--- a/2025.11.25_Понаровская_презентация_PP.pptx
+++ b/2025.11.25_Понаровская_презентация_PP.pptx
@@ -24970,8 +24970,8 @@
         </p:nvSpPr>
         <p:spPr>
           <a:xfrm>
-            <a:off x="553375" y="1745225"/>
-            <a:ext cx="10851900" cy="4576200"/>
+            <a:off x="553387" y="1893824"/>
+            <a:ext cx="10851900" cy="4423272"/>
           </a:xfrm>
           <a:prstGeom prst="rect">
             <a:avLst/>
@@ -24999,48 +24999,34 @@
             <a:r>
               <a:rPr lang="ru-RU" sz="2800" dirty="0">
                 <a:solidFill>
-                  <a:srgbClr val="FF0000"/>
-                </a:solidFill>
-              </a:rPr>
-              <a:t>Целью данной работы является исследование возможности и способов применения аппарата нечеткой логики к процессу управления требованиями при гибкой разработке ПО</a:t>
-            </a:r>
-          </a:p>
-          <a:p>
-            <a:pPr marL="74772">
-              <a:lnSpc>
-                <a:spcPct val="115000"/>
-              </a:lnSpc>
-              <a:buClr>
-                <a:srgbClr val="1F3864"/>
-              </a:buClr>
-              <a:buSzPct val="100000"/>
-            </a:pPr>
+                  <a:srgbClr val="002060"/>
+                </a:solidFill>
+              </a:rPr>
+              <a:t>Целью данной работы является исследование возможности и способов применения </a:t>
+            </a:r>
+            <a:r>
+              <a:rPr lang="ru-RU" sz="2800" b="1" dirty="0">
+                <a:solidFill>
+                  <a:srgbClr val="002060"/>
+                </a:solidFill>
+              </a:rPr>
+              <a:t>аппарата нечеткой логики </a:t>
+            </a:r>
             <a:r>
               <a:rPr lang="ru-RU" sz="2800" dirty="0">
                 <a:solidFill>
-                  <a:srgbClr val="FF0000"/>
-                </a:solidFill>
-              </a:rPr>
-              <a:t>или</a:t>
-            </a:r>
-          </a:p>
-          <a:p>
-            <a:pPr marL="74772">
-              <a:lnSpc>
-                <a:spcPct val="115000"/>
-              </a:lnSpc>
-              <a:buClr>
-                <a:srgbClr val="1F3864"/>
-              </a:buClr>
-              <a:buSzPct val="100000"/>
-            </a:pPr>
-            <a:r>
-              <a:rPr lang="ru-RU" sz="2800" dirty="0">
-                <a:solidFill>
-                  <a:srgbClr val="FF0000"/>
-                </a:solidFill>
-              </a:rPr>
-              <a:t>Исследование и анализ результатов применения нечеткого подхода к процессу управлению требованиями при гибкой разработке ПО.</a:t>
+                  <a:srgbClr val="002060"/>
+                </a:solidFill>
+              </a:rPr>
+              <a:t>к процессу </a:t>
+            </a:r>
+            <a:r>
+              <a:rPr lang="ru-RU" sz="2800" b="1" dirty="0">
+                <a:solidFill>
+                  <a:srgbClr val="002060"/>
+                </a:solidFill>
+              </a:rPr>
+              <a:t>управления требованиями при гибкой разработке ПО</a:t>
             </a:r>
           </a:p>
           <a:p>
@@ -25404,172 +25390,115 @@
           </a:bodyPr>
           <a:lstStyle/>
           <a:p>
-            <a:pPr marL="342900" lvl="0" indent="-342900">
+            <a:pPr marL="457200" lvl="0" indent="-457200">
+              <a:spcBef>
+                <a:spcPts val="1200"/>
+              </a:spcBef>
+              <a:spcAft>
+                <a:spcPts val="600"/>
+              </a:spcAft>
               <a:buFont typeface="+mj-lt"/>
               <a:buAutoNum type="arabicPeriod"/>
             </a:pPr>
             <a:r>
-              <a:rPr lang="ru-RU" sz="2000" i="1" dirty="0">
-                <a:solidFill>
-                  <a:srgbClr val="FF0000"/>
-                </a:solidFill>
-              </a:rPr>
-              <a:t>Что такое гибкие требования при разработке ПО и почему они возникли?</a:t>
-            </a:r>
-            <a:endParaRPr lang="ru-RU" sz="2000" dirty="0">
-              <a:solidFill>
-                <a:srgbClr val="FF0000"/>
-              </a:solidFill>
-            </a:endParaRPr>
-          </a:p>
-          <a:p>
-            <a:pPr marL="342900" lvl="0" indent="-342900">
+              <a:rPr lang="ru-RU" sz="2400" dirty="0">
+                <a:solidFill>
+                  <a:srgbClr val="002060"/>
+                </a:solidFill>
+              </a:rPr>
+              <a:t>В чем </a:t>
+            </a:r>
+            <a:r>
+              <a:rPr lang="ru-RU" sz="2400" b="1" dirty="0">
+                <a:solidFill>
+                  <a:srgbClr val="002060"/>
+                </a:solidFill>
+              </a:rPr>
+              <a:t>специфика и сложность работы с требованиями</a:t>
+            </a:r>
+            <a:r>
+              <a:rPr lang="ru-RU" sz="2400" dirty="0">
+                <a:solidFill>
+                  <a:srgbClr val="002060"/>
+                </a:solidFill>
+              </a:rPr>
+              <a:t> в гибкой разработке программного обеспечения по сравнению с традиционной?</a:t>
+            </a:r>
+          </a:p>
+          <a:p>
+            <a:pPr marL="457200" lvl="0" indent="-457200">
+              <a:spcBef>
+                <a:spcPts val="1200"/>
+              </a:spcBef>
+              <a:spcAft>
+                <a:spcPts val="600"/>
+              </a:spcAft>
               <a:buFont typeface="+mj-lt"/>
               <a:buAutoNum type="arabicPeriod"/>
             </a:pPr>
             <a:r>
-              <a:rPr lang="ru-RU" sz="2000" i="1" dirty="0">
-                <a:solidFill>
-                  <a:srgbClr val="FF0000"/>
-                </a:solidFill>
-              </a:rPr>
-              <a:t>В чем специфика и сложность работы с требованиями в гибкой разработке по сравнению с традиционной?</a:t>
-            </a:r>
-            <a:endParaRPr lang="ru-RU" sz="2000" dirty="0">
-              <a:solidFill>
-                <a:srgbClr val="FF0000"/>
-              </a:solidFill>
-            </a:endParaRPr>
-          </a:p>
-          <a:p>
-            <a:pPr marL="342900" lvl="0" indent="-342900">
+              <a:rPr lang="ru-RU" sz="2400" dirty="0">
+                <a:solidFill>
+                  <a:srgbClr val="002060"/>
+                </a:solidFill>
+              </a:rPr>
+              <a:t>Какие </a:t>
+            </a:r>
+            <a:r>
+              <a:rPr lang="ru-RU" sz="2400" b="1" dirty="0">
+                <a:solidFill>
+                  <a:srgbClr val="002060"/>
+                </a:solidFill>
+              </a:rPr>
+              <a:t>области управления требованиями</a:t>
+            </a:r>
+            <a:r>
+              <a:rPr lang="ru-RU" sz="2400" dirty="0">
+                <a:solidFill>
+                  <a:srgbClr val="002060"/>
+                </a:solidFill>
+              </a:rPr>
+              <a:t> при разработке ПО можно формализовать с использованием нечеткого подхода без потери гибкости и противоречия принципам </a:t>
+            </a:r>
+            <a:r>
+              <a:rPr lang="en-US" sz="2400" dirty="0">
+                <a:solidFill>
+                  <a:srgbClr val="002060"/>
+                </a:solidFill>
+              </a:rPr>
+              <a:t>Agile</a:t>
+            </a:r>
+            <a:r>
+              <a:rPr lang="ru-RU" sz="2400" dirty="0">
+                <a:solidFill>
+                  <a:srgbClr val="002060"/>
+                </a:solidFill>
+              </a:rPr>
+              <a:t>?</a:t>
+            </a:r>
+          </a:p>
+          <a:p>
+            <a:pPr marL="457200" lvl="0" indent="-457200">
+              <a:spcBef>
+                <a:spcPts val="1200"/>
+              </a:spcBef>
+              <a:spcAft>
+                <a:spcPts val="600"/>
+              </a:spcAft>
               <a:buFont typeface="+mj-lt"/>
               <a:buAutoNum type="arabicPeriod"/>
             </a:pPr>
             <a:r>
-              <a:rPr lang="ru-RU" sz="2000" i="1" dirty="0">
-                <a:solidFill>
-                  <a:srgbClr val="FF0000"/>
-                </a:solidFill>
-              </a:rPr>
-              <a:t>Какие условия и ограничения накладывает ли </a:t>
-            </a:r>
-            <a:r>
-              <a:rPr lang="en-US" sz="2000" i="1" dirty="0">
-                <a:solidFill>
-                  <a:srgbClr val="FF0000"/>
-                </a:solidFill>
-              </a:rPr>
-              <a:t>Agile</a:t>
-            </a:r>
-            <a:r>
-              <a:rPr lang="ru-RU" sz="2000" i="1" dirty="0">
-                <a:solidFill>
-                  <a:srgbClr val="FF0000"/>
-                </a:solidFill>
-              </a:rPr>
-              <a:t>-подход на требования к ПО?</a:t>
-            </a:r>
-            <a:endParaRPr lang="ru-RU" sz="2000" dirty="0">
+              <a:rPr lang="ru-RU" sz="2400" b="1" dirty="0">
+                <a:solidFill>
+                  <a:srgbClr val="002060"/>
+                </a:solidFill>
+              </a:rPr>
+              <a:t>Позволяет ли нечеткое моделирование предоставить больше информации о требованиях при гибкой разработке ПО?</a:t>
+            </a:r>
+            <a:endParaRPr lang="ru-RU" sz="2400" dirty="0">
               <a:solidFill>
-                <a:srgbClr val="FF0000"/>
-              </a:solidFill>
-            </a:endParaRPr>
-          </a:p>
-          <a:p>
-            <a:pPr marL="342900" lvl="0" indent="-342900">
-              <a:buFont typeface="+mj-lt"/>
-              <a:buAutoNum type="arabicPeriod"/>
-            </a:pPr>
-            <a:r>
-              <a:rPr lang="ru-RU" sz="2000" i="1" dirty="0">
-                <a:solidFill>
-                  <a:srgbClr val="FF0000"/>
-                </a:solidFill>
-              </a:rPr>
-              <a:t>В каких областях управления требованиями уме</a:t>
-            </a:r>
-            <a:r>
-              <a:rPr lang="en-US" sz="2000" i="1" dirty="0">
-                <a:solidFill>
-                  <a:srgbClr val="FF0000"/>
-                </a:solidFill>
-              </a:rPr>
-              <a:t>c</a:t>
-            </a:r>
-            <a:r>
-              <a:rPr lang="ru-RU" sz="2000" i="1" dirty="0" err="1">
-                <a:solidFill>
-                  <a:srgbClr val="FF0000"/>
-                </a:solidFill>
-              </a:rPr>
-              <a:t>тно</a:t>
-            </a:r>
-            <a:r>
-              <a:rPr lang="ru-RU" sz="2000" i="1" dirty="0">
-                <a:solidFill>
-                  <a:srgbClr val="FF0000"/>
-                </a:solidFill>
-              </a:rPr>
-              <a:t> применение нечеткой логики?</a:t>
-            </a:r>
-            <a:endParaRPr lang="ru-RU" sz="2000" dirty="0">
-              <a:solidFill>
-                <a:srgbClr val="FF0000"/>
-              </a:solidFill>
-            </a:endParaRPr>
-          </a:p>
-          <a:p>
-            <a:pPr marL="342900" lvl="0" indent="-342900">
-              <a:buFont typeface="+mj-lt"/>
-              <a:buAutoNum type="arabicPeriod"/>
-            </a:pPr>
-            <a:r>
-              <a:rPr lang="ru-RU" sz="2000" b="1" i="1" dirty="0">
-                <a:solidFill>
-                  <a:srgbClr val="FF0000"/>
-                </a:solidFill>
-              </a:rPr>
-              <a:t>Позволяет ли нечеткое моделирование предоставить больше информации о требованиях при гибкой разработке ПО?</a:t>
-            </a:r>
-            <a:endParaRPr lang="ru-RU" sz="2000" dirty="0">
-              <a:solidFill>
-                <a:srgbClr val="FF0000"/>
-              </a:solidFill>
-            </a:endParaRPr>
-          </a:p>
-          <a:p>
-            <a:pPr marL="342900" lvl="0" indent="-342900">
-              <a:buFont typeface="+mj-lt"/>
-              <a:buAutoNum type="arabicPeriod"/>
-            </a:pPr>
-            <a:r>
-              <a:rPr lang="ru-RU" sz="2000" i="1" dirty="0">
-                <a:solidFill>
-                  <a:srgbClr val="FF0000"/>
-                </a:solidFill>
-              </a:rPr>
-              <a:t>Какие элементы разработки ПО можно формализовать с использованием нечеткого подхода без «потери» гибкости и противоречия принципам </a:t>
-            </a:r>
-            <a:r>
-              <a:rPr lang="en-US" sz="2000" i="1" dirty="0">
-                <a:solidFill>
-                  <a:srgbClr val="FF0000"/>
-                </a:solidFill>
-              </a:rPr>
-              <a:t>Agile</a:t>
-            </a:r>
-            <a:r>
-              <a:rPr lang="ru-RU" sz="2000" i="1" dirty="0">
-                <a:solidFill>
-                  <a:srgbClr val="FF0000"/>
-                </a:solidFill>
-              </a:rPr>
-              <a:t>?</a:t>
-            </a:r>
-            <a:endParaRPr lang="ru-RU" sz="2000" dirty="0">
-              <a:solidFill>
-                <a:srgbClr val="FF0000"/>
+                <a:srgbClr val="002060"/>
               </a:solidFill>
             </a:endParaRPr>
           </a:p>
@@ -26437,7 +26366,7 @@
         <p:spPr>
           <a:xfrm>
             <a:off x="553375" y="1745225"/>
-            <a:ext cx="10851900" cy="4576200"/>
+            <a:ext cx="11019032" cy="4576200"/>
           </a:xfrm>
           <a:prstGeom prst="rect">
             <a:avLst/>
@@ -26453,121 +26382,251 @@
           </a:bodyPr>
           <a:lstStyle/>
           <a:p>
-            <a:pPr lvl="1"/>
-            <a:r>
-              <a:rPr lang="ru-RU" sz="1800" b="1" dirty="0">
-                <a:solidFill>
-                  <a:srgbClr val="FF0000"/>
-                </a:solidFill>
-              </a:rPr>
-              <a:t>По этапам управления требований</a:t>
-            </a:r>
-            <a:r>
-              <a:rPr lang="ru-RU" sz="1800" dirty="0">
-                <a:solidFill>
-                  <a:srgbClr val="FF0000"/>
-                </a:solidFill>
-              </a:rPr>
-              <a:t>, в которых определили целесообразность нечеткого моделирования </a:t>
-            </a:r>
-            <a:r>
-              <a:rPr lang="ru-RU" sz="1800" b="1" dirty="0">
-                <a:solidFill>
-                  <a:srgbClr val="FF0000"/>
+            <a:pPr lvl="0"/>
+            <a:r>
+              <a:rPr lang="ru-RU" sz="1600" b="1" dirty="0">
+                <a:solidFill>
+                  <a:srgbClr val="002060"/>
+                </a:solidFill>
+              </a:rPr>
+              <a:t>1. Изучить статьи и регламентирующие документы</a:t>
+            </a:r>
+            <a:r>
+              <a:rPr lang="ru-RU" sz="1600" dirty="0">
+                <a:solidFill>
+                  <a:srgbClr val="002060"/>
+                </a:solidFill>
+              </a:rPr>
+              <a:t> по теме исследования. Выполнить сравнительный анализ особенностей и отличий данных подходов к разработке ПО.</a:t>
+            </a:r>
+          </a:p>
+          <a:p>
+            <a:pPr lvl="0"/>
+            <a:r>
+              <a:rPr lang="ru-RU" sz="1600" b="1" dirty="0">
+                <a:solidFill>
+                  <a:srgbClr val="002060"/>
+                </a:solidFill>
+              </a:rPr>
+              <a:t>2. Рассмотреть этапы управления требованиями</a:t>
+            </a:r>
+            <a:r>
+              <a:rPr lang="ru-RU" sz="1600" dirty="0">
+                <a:solidFill>
+                  <a:srgbClr val="002060"/>
+                </a:solidFill>
+              </a:rPr>
+              <a:t>. Отметить те, где возможно применение теории нечетких множеств. Объяснить, почему именно на этих этапах планируется использовать нечеткий подход. </a:t>
+            </a:r>
+          </a:p>
+          <a:p>
+            <a:pPr lvl="0"/>
+            <a:r>
+              <a:rPr lang="ru-RU" sz="1600" b="1" dirty="0">
+                <a:solidFill>
+                  <a:srgbClr val="002060"/>
+                </a:solidFill>
+              </a:rPr>
+              <a:t>3. Описать существующие методы приоритизации требований</a:t>
+            </a:r>
+            <a:r>
+              <a:rPr lang="ru-RU" sz="1600" dirty="0">
+                <a:solidFill>
+                  <a:srgbClr val="002060"/>
+                </a:solidFill>
+              </a:rPr>
+              <a:t>. Изучить подходы к коллективной приоритизации, когда команда: достигла консенсуса, частично пришла к консенсусу, не пришла к консенсусу. Выбрать метод приоритизации, который будет использован в ходе данного исследования.</a:t>
+            </a:r>
+          </a:p>
+          <a:p>
+            <a:pPr lvl="0"/>
+            <a:r>
+              <a:rPr lang="ru-RU" sz="1600" b="1" dirty="0">
+                <a:solidFill>
+                  <a:srgbClr val="002060"/>
+                </a:solidFill>
+              </a:rPr>
+              <a:t>4. Представить ключевые аспекты теории нечетких множеств</a:t>
+            </a:r>
+            <a:r>
+              <a:rPr lang="ru-RU" sz="1600" dirty="0">
+                <a:solidFill>
+                  <a:srgbClr val="002060"/>
+                </a:solidFill>
+              </a:rPr>
+              <a:t>. Отметить виды нечетких множеств и обоснование выбора типов, которые будут использоваться в работе.</a:t>
+            </a:r>
+          </a:p>
+          <a:p>
+            <a:pPr lvl="0"/>
+            <a:r>
+              <a:rPr lang="ru-RU" sz="1600" b="1" dirty="0">
+                <a:solidFill>
+                  <a:srgbClr val="002060"/>
+                </a:solidFill>
+              </a:rPr>
+              <a:t>5. На этапах управления требований</a:t>
+            </a:r>
+            <a:r>
+              <a:rPr lang="ru-RU" sz="1600" dirty="0">
+                <a:solidFill>
+                  <a:srgbClr val="002060"/>
+                </a:solidFill>
+              </a:rPr>
+              <a:t>, в которых отмечена целесообразность нечеткого моделирования, </a:t>
+            </a:r>
+            <a:r>
+              <a:rPr lang="ru-RU" sz="1600" b="1" dirty="0">
+                <a:solidFill>
+                  <a:srgbClr val="002060"/>
                 </a:solidFill>
               </a:rPr>
               <a:t>определить</a:t>
             </a:r>
             <a:r>
-              <a:rPr lang="ru-RU" sz="1800" dirty="0">
-                <a:solidFill>
-                  <a:srgbClr val="FF0000"/>
+              <a:rPr lang="ru-RU" sz="1600" dirty="0">
+                <a:solidFill>
+                  <a:srgbClr val="002060"/>
                 </a:solidFill>
               </a:rPr>
               <a:t> </a:t>
             </a:r>
             <a:r>
-              <a:rPr lang="ru-RU" sz="1800" b="1" dirty="0">
-                <a:solidFill>
-                  <a:srgbClr val="FF0000"/>
-                </a:solidFill>
-              </a:rPr>
-              <a:t>механизм применения нечетких множеств: в сборе и приоритизации требований.</a:t>
-            </a:r>
-            <a:endParaRPr lang="ru-RU" sz="1800" dirty="0">
+              <a:rPr lang="ru-RU" sz="1600" b="1" dirty="0">
+                <a:solidFill>
+                  <a:srgbClr val="002060"/>
+                </a:solidFill>
+              </a:rPr>
+              <a:t>механизм применения нечетких множеств.</a:t>
+            </a:r>
+            <a:endParaRPr lang="ru-RU" sz="1600" dirty="0">
               <a:solidFill>
-                <a:srgbClr val="FF0000"/>
+                <a:srgbClr val="002060"/>
               </a:solidFill>
             </a:endParaRPr>
           </a:p>
           <a:p>
-            <a:pPr lvl="1"/>
-            <a:r>
-              <a:rPr lang="ru-RU" sz="1800" b="1" dirty="0">
-                <a:solidFill>
-                  <a:srgbClr val="FF0000"/>
-                </a:solidFill>
-              </a:rPr>
-              <a:t>В сборе требований рассмотреть процесс формализации требований</a:t>
-            </a:r>
-            <a:r>
-              <a:rPr lang="ru-RU" sz="1800" dirty="0">
-                <a:solidFill>
-                  <a:srgbClr val="FF0000"/>
-                </a:solidFill>
-              </a:rPr>
-              <a:t> для включения в бэклог разработки. Как выполнить переход от зафиксированной информации от стейкхолдера к формальным требованиям к разрабатываемому ПО. Предложенный подход, с одной стороны, должен быть четко и ясно формализован, с другой – сохранять гибкость подхода к разработке (соблюдение принципов </a:t>
-            </a:r>
-            <a:r>
-              <a:rPr lang="en-US" sz="1800" dirty="0">
-                <a:solidFill>
-                  <a:srgbClr val="FF0000"/>
+            <a:pPr marL="269875" lvl="3"/>
+            <a:r>
+              <a:rPr lang="ru-RU" sz="1600" b="1" dirty="0">
+                <a:solidFill>
+                  <a:srgbClr val="002060"/>
+                </a:solidFill>
+              </a:rPr>
+              <a:t>5.1. В сборе требований рассмотреть процесс формализации требований</a:t>
+            </a:r>
+            <a:r>
+              <a:rPr lang="ru-RU" sz="1600" dirty="0">
+                <a:solidFill>
+                  <a:srgbClr val="002060"/>
+                </a:solidFill>
+              </a:rPr>
+              <a:t> для включения в бэклог разработки. </a:t>
+            </a:r>
+          </a:p>
+          <a:p>
+            <a:pPr marL="269875" lvl="3"/>
+            <a:r>
+              <a:rPr lang="ru-RU" sz="1600" b="1" dirty="0">
+                <a:solidFill>
+                  <a:srgbClr val="002060"/>
+                </a:solidFill>
+              </a:rPr>
+              <a:t>5.2. В процессе приоритизации требований </a:t>
+            </a:r>
+            <a:r>
+              <a:rPr lang="ru-RU" sz="1600" dirty="0">
+                <a:solidFill>
+                  <a:srgbClr val="002060"/>
+                </a:solidFill>
+              </a:rPr>
+              <a:t>будет рассмотрен нечеткий подход и его сравнение с традиционным (четким) подходом.</a:t>
+            </a:r>
+          </a:p>
+          <a:p>
+            <a:pPr lvl="2"/>
+            <a:r>
+              <a:rPr lang="ru-RU" sz="1600" b="1" dirty="0">
+                <a:solidFill>
+                  <a:srgbClr val="002060"/>
+                </a:solidFill>
+              </a:rPr>
+              <a:t>6. </a:t>
+            </a:r>
+            <a:r>
+              <a:rPr lang="ru-RU" sz="1600" dirty="0">
+                <a:solidFill>
+                  <a:srgbClr val="002060"/>
+                </a:solidFill>
+              </a:rPr>
+              <a:t>Сделать </a:t>
+            </a:r>
+            <a:r>
+              <a:rPr lang="ru-RU" sz="1600" b="1" dirty="0">
+                <a:solidFill>
+                  <a:srgbClr val="002060"/>
+                </a:solidFill>
+              </a:rPr>
+              <a:t>выводы о целесообразности применения</a:t>
+            </a:r>
+            <a:r>
+              <a:rPr lang="ru-RU" sz="1600" dirty="0">
+                <a:solidFill>
+                  <a:srgbClr val="002060"/>
+                </a:solidFill>
+              </a:rPr>
+              <a:t> теории нечетких множеств к управлению требованиями в </a:t>
+            </a:r>
+            <a:r>
+              <a:rPr lang="en-US" sz="1600" dirty="0">
+                <a:solidFill>
+                  <a:srgbClr val="002060"/>
                 </a:solidFill>
               </a:rPr>
               <a:t>Agile</a:t>
             </a:r>
             <a:r>
-              <a:rPr lang="ru-RU" sz="1800" dirty="0">
-                <a:solidFill>
-                  <a:srgbClr val="FF0000"/>
-                </a:solidFill>
-              </a:rPr>
-              <a:t>-методологии). Здесь полностью алгоритмический подход вряд ли возможен, Элемент субъективности в описании требований вероятнее всего останется, человеческий фактор останется. Дать сравнение результатов с применением нечетких множеств и без них.</a:t>
-            </a:r>
-          </a:p>
-          <a:p>
-            <a:pPr lvl="1"/>
-            <a:r>
-              <a:rPr lang="ru-RU" sz="1800" b="1" dirty="0">
-                <a:solidFill>
-                  <a:srgbClr val="FF0000"/>
-                </a:solidFill>
-              </a:rPr>
-              <a:t>В процессе приоритизации требований </a:t>
-            </a:r>
-            <a:r>
-              <a:rPr lang="ru-RU" sz="1800" dirty="0">
-                <a:solidFill>
-                  <a:srgbClr val="FF0000"/>
-                </a:solidFill>
-              </a:rPr>
-              <a:t>(как уже рассмотрено выше – речь пойдет о коллективном принятии решений, в случае частичного консенсуса или его полного отсутствия, выбор метода приоритизации также будет сделан в теоретической главе, возможно это будет </a:t>
-            </a:r>
-            <a:r>
-              <a:rPr lang="en-US" sz="1800" dirty="0" err="1">
-                <a:solidFill>
-                  <a:srgbClr val="FF0000"/>
-                </a:solidFill>
-              </a:rPr>
-              <a:t>MoSCoW</a:t>
-            </a:r>
-            <a:r>
-              <a:rPr lang="ru-RU" sz="1800" dirty="0">
-                <a:solidFill>
-                  <a:srgbClr val="FF0000"/>
-                </a:solidFill>
-              </a:rPr>
-              <a:t>) будет рассмотрен нечеткий подход и его сравнение с традиционным (четким подходом).</a:t>
+              <a:rPr lang="ru-RU" sz="1600" dirty="0">
+                <a:solidFill>
+                  <a:srgbClr val="002060"/>
+                </a:solidFill>
+              </a:rPr>
+              <a:t>-разработке.</a:t>
+            </a:r>
+          </a:p>
+          <a:p>
+            <a:pPr lvl="0"/>
+            <a:r>
+              <a:rPr lang="ru-RU" sz="1600" b="1" dirty="0">
+                <a:solidFill>
+                  <a:srgbClr val="002060"/>
+                </a:solidFill>
+              </a:rPr>
+              <a:t>7. </a:t>
+            </a:r>
+            <a:r>
+              <a:rPr lang="ru-RU" sz="1600" dirty="0">
+                <a:solidFill>
+                  <a:srgbClr val="002060"/>
+                </a:solidFill>
+              </a:rPr>
+              <a:t>Дать </a:t>
+            </a:r>
+            <a:r>
+              <a:rPr lang="ru-RU" sz="1600" b="1" dirty="0">
+                <a:solidFill>
+                  <a:srgbClr val="002060"/>
+                </a:solidFill>
+              </a:rPr>
+              <a:t>рекомендации и сформулировать вывод</a:t>
+            </a:r>
+            <a:r>
+              <a:rPr lang="ru-RU" sz="1600" dirty="0">
+                <a:solidFill>
+                  <a:srgbClr val="002060"/>
+                </a:solidFill>
+              </a:rPr>
+              <a:t> о возможных дальнейших направлениях исследований.</a:t>
             </a:r>
           </a:p>
         </p:txBody>
@@ -27451,10 +27510,26 @@
             <a:r>
               <a:rPr lang="ru-RU" sz="1800" dirty="0">
                 <a:solidFill>
-                  <a:srgbClr val="FF0000"/>
-                </a:solidFill>
-              </a:rPr>
-              <a:t>Выполнен сравнительный анализ подходов к управлению требований в гибком и традиционном подходе к разработке ПО;</a:t>
+                  <a:srgbClr val="002060"/>
+                </a:solidFill>
+              </a:rPr>
+              <a:t>Выполнен </a:t>
+            </a:r>
+            <a:r>
+              <a:rPr lang="ru-RU" sz="1800" b="1" dirty="0">
+                <a:solidFill>
+                  <a:srgbClr val="002060"/>
+                </a:solidFill>
+              </a:rPr>
+              <a:t>сравнительный анализ подходов к управлению требованиями </a:t>
+            </a:r>
+            <a:r>
+              <a:rPr lang="ru-RU" sz="1800" dirty="0">
+                <a:solidFill>
+                  <a:srgbClr val="002060"/>
+                </a:solidFill>
+              </a:rPr>
+              <a:t>в гибком и традиционном подходе к разработке ПО.</a:t>
             </a:r>
           </a:p>
           <a:p>
@@ -27465,10 +27540,26 @@
             <a:r>
               <a:rPr lang="ru-RU" sz="1800" dirty="0">
                 <a:solidFill>
-                  <a:srgbClr val="FF0000"/>
-                </a:solidFill>
-              </a:rPr>
-              <a:t>Выполнено описание этапов гибкого управления требований и обоснованные рекомендации по применением нечеткого подхода к тем разделам, где он целесообразен;</a:t>
+                  <a:srgbClr val="002060"/>
+                </a:solidFill>
+              </a:rPr>
+              <a:t>Описаны </a:t>
+            </a:r>
+            <a:r>
+              <a:rPr lang="ru-RU" sz="1800" b="1" dirty="0">
+                <a:solidFill>
+                  <a:srgbClr val="002060"/>
+                </a:solidFill>
+              </a:rPr>
+              <a:t>этапы гибкого управления требований </a:t>
+            </a:r>
+            <a:r>
+              <a:rPr lang="ru-RU" sz="1800" dirty="0">
+                <a:solidFill>
+                  <a:srgbClr val="002060"/>
+                </a:solidFill>
+              </a:rPr>
+              <a:t>и даны рекомендации по применением нечеткого подхода к тем разделам, где он целесообразен.</a:t>
             </a:r>
           </a:p>
           <a:p>
@@ -27479,10 +27570,26 @@
             <a:r>
               <a:rPr lang="ru-RU" sz="1800" dirty="0">
                 <a:solidFill>
-                  <a:srgbClr val="FF0000"/>
-                </a:solidFill>
-              </a:rPr>
-              <a:t>Выполнено описание методов приоритизации требований при коллективном принятии решений и методические подходы к задаче принятия коллективных решений при отсутствии начального полного консенсуса;</a:t>
+                  <a:srgbClr val="002060"/>
+                </a:solidFill>
+              </a:rPr>
+              <a:t>Выполнены </a:t>
+            </a:r>
+            <a:r>
+              <a:rPr lang="ru-RU" sz="1800" b="1" dirty="0">
+                <a:solidFill>
+                  <a:srgbClr val="002060"/>
+                </a:solidFill>
+              </a:rPr>
+              <a:t>описания методов приоритизации требований </a:t>
+            </a:r>
+            <a:r>
+              <a:rPr lang="ru-RU" sz="1800" dirty="0">
+                <a:solidFill>
+                  <a:srgbClr val="002060"/>
+                </a:solidFill>
+              </a:rPr>
+              <a:t>при коллективном принятии решений и изложены методические подходы к задаче принятия коллективных решений при отсутствии начального полного консенсуса.</a:t>
             </a:r>
           </a:p>
           <a:p>
@@ -27493,10 +27600,26 @@
             <a:r>
               <a:rPr lang="ru-RU" sz="1800" dirty="0">
                 <a:solidFill>
-                  <a:srgbClr val="FF0000"/>
-                </a:solidFill>
-              </a:rPr>
-              <a:t>Дана классификация типов нечетких множеств и выполнено обоснование целесообразности их применения к решению задач данного исследования;</a:t>
+                  <a:srgbClr val="002060"/>
+                </a:solidFill>
+              </a:rPr>
+              <a:t>Дана </a:t>
+            </a:r>
+            <a:r>
+              <a:rPr lang="ru-RU" sz="1800" b="1" dirty="0">
+                <a:solidFill>
+                  <a:srgbClr val="002060"/>
+                </a:solidFill>
+              </a:rPr>
+              <a:t>классификация типов нечетких множеств </a:t>
+            </a:r>
+            <a:r>
+              <a:rPr lang="ru-RU" sz="1800" dirty="0">
+                <a:solidFill>
+                  <a:srgbClr val="002060"/>
+                </a:solidFill>
+              </a:rPr>
+              <a:t>и выполнено обоснование целесообразности их применения к решению задач данного исследования.</a:t>
             </a:r>
           </a:p>
           <a:p>
@@ -27507,10 +27630,26 @@
             <a:r>
               <a:rPr lang="ru-RU" sz="1800" dirty="0">
                 <a:solidFill>
-                  <a:srgbClr val="FF0000"/>
-                </a:solidFill>
-              </a:rPr>
-              <a:t>Сформулированы методологические подходы применения теории нечетких множеств в процессе формализации и приоритизации требований к разрабатываемому ПО;</a:t>
+                  <a:srgbClr val="002060"/>
+                </a:solidFill>
+              </a:rPr>
+              <a:t>Сформулированы </a:t>
+            </a:r>
+            <a:r>
+              <a:rPr lang="ru-RU" sz="1800" b="1" dirty="0">
+                <a:solidFill>
+                  <a:srgbClr val="002060"/>
+                </a:solidFill>
+              </a:rPr>
+              <a:t>методологические подходы применения теории нечетких множеств в процессе формализации и приоритизации требований</a:t>
+            </a:r>
+            <a:r>
+              <a:rPr lang="ru-RU" sz="1800" dirty="0">
+                <a:solidFill>
+                  <a:srgbClr val="002060"/>
+                </a:solidFill>
+              </a:rPr>
+              <a:t> к разрабатываемому ПО.</a:t>
             </a:r>
           </a:p>
           <a:p>
@@ -27521,10 +27660,26 @@
             <a:r>
               <a:rPr lang="ru-RU" sz="1800" dirty="0">
                 <a:solidFill>
-                  <a:srgbClr val="FF0000"/>
-                </a:solidFill>
-              </a:rPr>
-              <a:t>Выполнено обоснование целесообразности применение нечеткого подхода в процессе управления требованиями в виде сравнения результатов нечетких вычислений и традиционного четкого подхода;</a:t>
+                  <a:srgbClr val="002060"/>
+                </a:solidFill>
+              </a:rPr>
+              <a:t>Выполнено обоснование </a:t>
+            </a:r>
+            <a:r>
+              <a:rPr lang="ru-RU" sz="1800" b="1" dirty="0">
+                <a:solidFill>
+                  <a:srgbClr val="002060"/>
+                </a:solidFill>
+              </a:rPr>
+              <a:t>целесообразности применение нечеткого подхода в процессе управления требованиями</a:t>
+            </a:r>
+            <a:r>
+              <a:rPr lang="ru-RU" sz="1800" dirty="0">
+                <a:solidFill>
+                  <a:srgbClr val="002060"/>
+                </a:solidFill>
+              </a:rPr>
+              <a:t> в виде сравнения результатов нечетких вычислений и традиционного, четкого подхода.</a:t>
             </a:r>
           </a:p>
           <a:p>
@@ -27535,15 +27690,31 @@
             <a:r>
               <a:rPr lang="ru-RU" sz="1800" dirty="0">
                 <a:solidFill>
-                  <a:srgbClr val="FF0000"/>
-                </a:solidFill>
-              </a:rPr>
-              <a:t>Отмечены возможные дальнейшие направления исследований применения теории нечетких множеств в </a:t>
+                  <a:srgbClr val="002060"/>
+                </a:solidFill>
+              </a:rPr>
+              <a:t>Отмечены возможные </a:t>
+            </a:r>
+            <a:r>
+              <a:rPr lang="ru-RU" sz="1800" b="1" dirty="0">
+                <a:solidFill>
+                  <a:srgbClr val="002060"/>
+                </a:solidFill>
+              </a:rPr>
+              <a:t>дальнейшие направления исследований</a:t>
+            </a:r>
+            <a:r>
+              <a:rPr lang="ru-RU" sz="1800" dirty="0">
+                <a:solidFill>
+                  <a:srgbClr val="002060"/>
+                </a:solidFill>
+              </a:rPr>
+              <a:t> применения теории нечетких множеств в </a:t>
             </a:r>
             <a:r>
               <a:rPr lang="en-US" sz="1800" dirty="0">
                 <a:solidFill>
-                  <a:srgbClr val="FF0000"/>
+                  <a:srgbClr val="002060"/>
                 </a:solidFill>
               </a:rPr>
               <a:t>Agile</a:t>
@@ -27551,14 +27722,10 @@
             <a:r>
               <a:rPr lang="ru-RU" sz="1800" dirty="0">
                 <a:solidFill>
-                  <a:srgbClr val="FF0000"/>
-                </a:solidFill>
-              </a:rPr>
-              <a:t>-в общем и инженерии требований в частности</a:t>
-            </a:r>
-            <a:r>
-              <a:rPr lang="ru-RU" sz="1800" dirty="0"/>
-              <a:t>.</a:t>
+                  <a:srgbClr val="002060"/>
+                </a:solidFill>
+              </a:rPr>
+              <a:t>-методологиях, инженерии требований и других направлениях.</a:t>
             </a:r>
           </a:p>
         </p:txBody>
@@ -28429,10 +28596,14 @@
           </a:bodyPr>
           <a:lstStyle/>
           <a:p>
+            <a:pPr marL="342900" indent="-342900">
+              <a:buFont typeface="Arial" panose="020B0604020202020204" pitchFamily="34" charset="0"/>
+              <a:buChar char="•"/>
+            </a:pPr>
             <a:r>
               <a:rPr lang="ru-RU" sz="2400" dirty="0">
                 <a:solidFill>
-                  <a:srgbClr val="FF0000"/>
+                  <a:srgbClr val="002060"/>
                 </a:solidFill>
               </a:rPr>
               <a:t>Для выполнения расчетов будет использован аппарат </a:t>
@@ -28440,7 +28611,7 @@
             <a:r>
               <a:rPr lang="ru-RU" sz="2400" b="1" dirty="0">
                 <a:solidFill>
-                  <a:srgbClr val="FF0000"/>
+                  <a:srgbClr val="002060"/>
                 </a:solidFill>
               </a:rPr>
               <a:t>нечетких множеств</a:t>
@@ -28448,7 +28619,7 @@
             <a:r>
               <a:rPr lang="ru-RU" sz="2400" dirty="0">
                 <a:solidFill>
-                  <a:srgbClr val="FF0000"/>
+                  <a:srgbClr val="002060"/>
                 </a:solidFill>
               </a:rPr>
               <a:t> (англ. </a:t>
@@ -28456,7 +28627,7 @@
             <a:r>
               <a:rPr lang="en-US" sz="2400" i="1" dirty="0">
                 <a:solidFill>
-                  <a:srgbClr val="FF0000"/>
+                  <a:srgbClr val="002060"/>
                 </a:solidFill>
               </a:rPr>
               <a:t>Fuzzy Sets</a:t>
@@ -28464,7 +28635,7 @@
             <a:r>
               <a:rPr lang="ru-RU" sz="2400" dirty="0">
                 <a:solidFill>
-                  <a:srgbClr val="FF0000"/>
+                  <a:srgbClr val="002060"/>
                 </a:solidFill>
               </a:rPr>
               <a:t>, </a:t>
@@ -28472,7 +28643,7 @@
             <a:r>
               <a:rPr lang="ru-RU" sz="2400" dirty="0" err="1">
                 <a:solidFill>
-                  <a:srgbClr val="FF0000"/>
+                  <a:srgbClr val="002060"/>
                 </a:solidFill>
               </a:rPr>
               <a:t>аббр</a:t>
@@ -28480,7 +28651,7 @@
             <a:r>
               <a:rPr lang="ru-RU" sz="2400" dirty="0">
                 <a:solidFill>
-                  <a:srgbClr val="FF0000"/>
+                  <a:srgbClr val="002060"/>
                 </a:solidFill>
               </a:rPr>
               <a:t>. </a:t>
@@ -28488,7 +28659,7 @@
             <a:r>
               <a:rPr lang="en-US" sz="2400" i="1" dirty="0">
                 <a:solidFill>
-                  <a:srgbClr val="FF0000"/>
+                  <a:srgbClr val="002060"/>
                 </a:solidFill>
               </a:rPr>
               <a:t>FS</a:t>
@@ -28496,7 +28667,7 @@
             <a:r>
               <a:rPr lang="ru-RU" sz="2400" dirty="0">
                 <a:solidFill>
-                  <a:srgbClr val="FF0000"/>
+                  <a:srgbClr val="002060"/>
                 </a:solidFill>
               </a:rPr>
               <a:t>), для </a:t>
@@ -28504,7 +28675,7 @@
             <a:r>
               <a:rPr lang="ru-RU" sz="2400" dirty="0" err="1">
                 <a:solidFill>
-                  <a:srgbClr val="FF0000"/>
+                  <a:srgbClr val="002060"/>
                 </a:solidFill>
               </a:rPr>
               <a:t>д</a:t>
@@ -28512,7 +28683,7 @@
             <a:r>
               <a:rPr lang="ru-RU" sz="2400" b="1" dirty="0" err="1">
                 <a:solidFill>
-                  <a:srgbClr val="FF0000"/>
+                  <a:srgbClr val="002060"/>
                 </a:solidFill>
               </a:rPr>
               <a:t>ефаззификации</a:t>
@@ -28520,7 +28691,7 @@
             <a:r>
               <a:rPr lang="ru-RU" sz="2400" dirty="0">
                 <a:solidFill>
-                  <a:srgbClr val="FF0000"/>
+                  <a:srgbClr val="002060"/>
                 </a:solidFill>
               </a:rPr>
               <a:t> нечетких результатов планируется применение </a:t>
@@ -28528,7 +28699,7 @@
             <a:r>
               <a:rPr lang="en-US" sz="2400" b="1" dirty="0">
                 <a:solidFill>
-                  <a:srgbClr val="FF0000"/>
+                  <a:srgbClr val="002060"/>
                 </a:solidFill>
               </a:rPr>
               <a:t>α</a:t>
@@ -28536,22 +28707,14 @@
             <a:r>
               <a:rPr lang="ru-RU" sz="2400" b="1" dirty="0">
                 <a:solidFill>
-                  <a:srgbClr val="FF0000"/>
+                  <a:srgbClr val="002060"/>
                 </a:solidFill>
               </a:rPr>
               <a:t>-срезов</a:t>
-            </a:r>
-            <a:r>
-              <a:rPr lang="ru-RU" sz="2400" i="1" dirty="0">
-                <a:solidFill>
-                  <a:srgbClr val="FF0000"/>
-                </a:solidFill>
-              </a:rPr>
-              <a:t>.</a:t>
             </a:r>
             <a:endParaRPr lang="ru-RU" sz="2400" dirty="0">
               <a:solidFill>
-                <a:srgbClr val="FF0000"/>
+                <a:srgbClr val="002060"/>
               </a:solidFill>
             </a:endParaRPr>
           </a:p>
@@ -28559,17 +28722,21 @@
             <a:r>
               <a:rPr lang="ru-RU" sz="2400" dirty="0">
                 <a:solidFill>
-                  <a:srgbClr val="FF0000"/>
+                  <a:srgbClr val="002060"/>
                 </a:solidFill>
               </a:rPr>
               <a:t> </a:t>
             </a:r>
           </a:p>
           <a:p>
+            <a:pPr marL="342900" indent="-342900">
+              <a:buFont typeface="Arial" panose="020B0604020202020204" pitchFamily="34" charset="0"/>
+              <a:buChar char="•"/>
+            </a:pPr>
             <a:r>
               <a:rPr lang="ru-RU" sz="2400" dirty="0">
                 <a:solidFill>
-                  <a:srgbClr val="FF0000"/>
+                  <a:srgbClr val="002060"/>
                 </a:solidFill>
               </a:rPr>
               <a:t>В качестве метода приоритизации требований будет использован </a:t>
@@ -28577,7 +28744,7 @@
             <a:r>
               <a:rPr lang="ru-RU" sz="2400" b="1" dirty="0">
                 <a:solidFill>
-                  <a:srgbClr val="FF0000"/>
+                  <a:srgbClr val="002060"/>
                 </a:solidFill>
               </a:rPr>
               <a:t>метод </a:t>
@@ -28585,7 +28752,7 @@
             <a:r>
               <a:rPr lang="en-US" sz="2400" b="1" dirty="0" err="1">
                 <a:solidFill>
-                  <a:srgbClr val="FF0000"/>
+                  <a:srgbClr val="002060"/>
                 </a:solidFill>
               </a:rPr>
               <a:t>MoSCoW</a:t>
@@ -28593,10 +28760,10 @@
             <a:r>
               <a:rPr lang="ru-RU" sz="2400" dirty="0">
                 <a:solidFill>
-                  <a:srgbClr val="FF0000"/>
-                </a:solidFill>
-              </a:rPr>
-              <a:t>, как достаточно простой и наглядный инструмент, позволяющий оперативно получить искомый результат.</a:t>
+                  <a:srgbClr val="002060"/>
+                </a:solidFill>
+              </a:rPr>
+              <a:t>, как достаточно простой и наглядный инструмент, позволяющий оперативно получить искомый результат</a:t>
             </a:r>
           </a:p>
         </p:txBody>
@@ -29459,62 +29626,53 @@
         </p:spPr>
         <p:txBody>
           <a:bodyPr spcFirstLastPara="1" wrap="square" lIns="91425" tIns="45700" rIns="91425" bIns="45700" anchor="t" anchorCtr="0">
-            <a:normAutofit/>
+            <a:noAutofit/>
           </a:bodyPr>
           <a:lstStyle/>
           <a:p>
-            <a:r>
-              <a:rPr lang="ru-RU" sz="1800" dirty="0">
-                <a:solidFill>
-                  <a:srgbClr val="FF0000"/>
+            <a:pPr marL="285750" indent="-285750">
+              <a:spcAft>
+                <a:spcPts val="600"/>
+              </a:spcAft>
+              <a:buFont typeface="Arial" panose="020B0604020202020204" pitchFamily="34" charset="0"/>
+              <a:buChar char="•"/>
+            </a:pPr>
+            <a:r>
+              <a:rPr lang="ru-RU" sz="2000" b="1" dirty="0">
+                <a:solidFill>
+                  <a:srgbClr val="002060"/>
                 </a:solidFill>
               </a:rPr>
               <a:t>Программная реализация расчетов будет выполнена на языке </a:t>
             </a:r>
             <a:r>
-              <a:rPr lang="en-US" sz="1800" i="1" dirty="0">
-                <a:solidFill>
-                  <a:srgbClr val="FF0000"/>
+              <a:rPr lang="en-US" sz="2000" b="1" i="1" dirty="0">
+                <a:solidFill>
+                  <a:srgbClr val="002060"/>
                 </a:solidFill>
               </a:rPr>
               <a:t>Python</a:t>
             </a:r>
             <a:r>
-              <a:rPr lang="ru-RU" sz="1800" i="1" dirty="0">
-                <a:solidFill>
-                  <a:srgbClr val="FF0000"/>
+              <a:rPr lang="ru-RU" sz="2000" i="1" dirty="0">
+                <a:solidFill>
+                  <a:srgbClr val="002060"/>
                 </a:solidFill>
               </a:rPr>
               <a:t>, </a:t>
             </a:r>
             <a:r>
-              <a:rPr lang="ru-RU" sz="1800" dirty="0">
-                <a:solidFill>
-                  <a:srgbClr val="FF0000"/>
-                </a:solidFill>
-              </a:rPr>
-              <a:t>что позволит представить расчетный механизм в виде алгоритма, сделать процесс вычисления быстрым и гибким, так как входные параметры могут легко меняться пользователем в зависимости от решаемой задачи. При необходимости данные для наглядности могут быть представлены в виде таблиц </a:t>
-            </a:r>
-            <a:r>
-              <a:rPr lang="en-US" sz="1800" dirty="0">
-                <a:solidFill>
-                  <a:srgbClr val="FF0000"/>
-                </a:solidFill>
-              </a:rPr>
-              <a:t>Excel</a:t>
-            </a:r>
-            <a:r>
-              <a:rPr lang="ru-RU" sz="1800" dirty="0">
-                <a:solidFill>
-                  <a:srgbClr val="FF0000"/>
-                </a:solidFill>
-              </a:rPr>
-              <a:t>. На все электронные таблицы, программный код будут даны ссылки в приложениях к данной выпускной квалификационной работе. Сами файлы будут размещены на сайте </a:t>
-            </a:r>
-            <a:r>
-              <a:rPr lang="ru-RU" sz="1800" u="sng" dirty="0">
-                <a:solidFill>
-                  <a:srgbClr val="FF0000"/>
+              <a:rPr lang="ru-RU" sz="2000" dirty="0">
+                <a:solidFill>
+                  <a:srgbClr val="002060"/>
+                </a:solidFill>
+              </a:rPr>
+              <a:t>что позволит представить расчетный механизм в виде алгоритма, сделать процесс вычисления быстрым и гибким, так как входные параметры могут легко меняться пользователем в зависимости от решаемой задачи. Файл с кодом будет размещен в репозитории на сайте </a:t>
+            </a:r>
+            <a:r>
+              <a:rPr lang="ru-RU" sz="2000" u="sng" dirty="0">
+                <a:solidFill>
+                  <a:srgbClr val="002060"/>
                 </a:solidFill>
                 <a:hlinkClick r:id="rId3">
                   <a:extLst>
@@ -29524,36 +29682,139 @@
                   </a:extLst>
                 </a:hlinkClick>
               </a:rPr>
-              <a:t>https://github.com/</a:t>
-            </a:r>
-            <a:r>
-              <a:rPr lang="ru-RU" sz="1800" dirty="0">
-                <a:solidFill>
-                  <a:srgbClr val="FF0000"/>
-                </a:solidFill>
-              </a:rPr>
-              <a:t>, в репозитории «</a:t>
-            </a:r>
-            <a:r>
-              <a:rPr lang="en-US" sz="1800" i="1" dirty="0">
-                <a:solidFill>
-                  <a:srgbClr val="FF0000"/>
-                </a:solidFill>
-              </a:rPr>
-              <a:t>Fuzzy Agile Development</a:t>
-            </a:r>
-            <a:r>
-              <a:rPr lang="ru-RU" sz="1800" dirty="0">
-                <a:solidFill>
-                  <a:srgbClr val="FF0000"/>
-                </a:solidFill>
-              </a:rPr>
-              <a:t>». Ссылка на репозиторий: </a:t>
-            </a:r>
-            <a:r>
-              <a:rPr lang="ru-RU" sz="1800" u="sng" dirty="0">
-                <a:solidFill>
-                  <a:srgbClr val="FF0000"/>
+              <a:t>https://github.com</a:t>
+            </a:r>
+            <a:endParaRPr lang="ru-RU" sz="2000" dirty="0">
+              <a:solidFill>
+                <a:srgbClr val="002060"/>
+              </a:solidFill>
+            </a:endParaRPr>
+          </a:p>
+          <a:p>
+            <a:pPr marL="285750" indent="-285750">
+              <a:spcAft>
+                <a:spcPts val="600"/>
+              </a:spcAft>
+              <a:buFont typeface="Arial" panose="020B0604020202020204" pitchFamily="34" charset="0"/>
+              <a:buChar char="•"/>
+            </a:pPr>
+            <a:r>
+              <a:rPr lang="en-US" sz="2000" b="1" dirty="0">
+                <a:solidFill>
+                  <a:srgbClr val="002060"/>
+                </a:solidFill>
+              </a:rPr>
+              <a:t>PERT</a:t>
+            </a:r>
+            <a:r>
+              <a:rPr lang="ru-RU" sz="2000" b="1" dirty="0">
+                <a:solidFill>
+                  <a:srgbClr val="002060"/>
+                </a:solidFill>
+              </a:rPr>
+              <a:t> диаграмма</a:t>
+            </a:r>
+            <a:r>
+              <a:rPr lang="ru-RU" sz="2000" dirty="0">
+                <a:solidFill>
+                  <a:srgbClr val="002060"/>
+                </a:solidFill>
+              </a:rPr>
+              <a:t> проекта выполнена в таблице </a:t>
+            </a:r>
+            <a:r>
+              <a:rPr lang="en-US" sz="2000" dirty="0">
+                <a:solidFill>
+                  <a:srgbClr val="002060"/>
+                </a:solidFill>
+              </a:rPr>
+              <a:t>Excel</a:t>
+            </a:r>
+            <a:r>
+              <a:rPr lang="ru-RU" sz="2000" dirty="0">
+                <a:solidFill>
+                  <a:srgbClr val="002060"/>
+                </a:solidFill>
+              </a:rPr>
+              <a:t>, что позволяет оперативно корректировать план работы над исследованием.</a:t>
+            </a:r>
+          </a:p>
+          <a:p>
+            <a:pPr marL="285750" indent="-285750">
+              <a:spcAft>
+                <a:spcPts val="600"/>
+              </a:spcAft>
+              <a:buFont typeface="Arial" panose="020B0604020202020204" pitchFamily="34" charset="0"/>
+              <a:buChar char="•"/>
+            </a:pPr>
+            <a:r>
+              <a:rPr lang="ru-RU" sz="2000" dirty="0">
+                <a:solidFill>
+                  <a:srgbClr val="002060"/>
+                </a:solidFill>
+              </a:rPr>
+              <a:t>Для построения </a:t>
+            </a:r>
+            <a:r>
+              <a:rPr lang="ru-RU" sz="2000" b="1" dirty="0">
+                <a:solidFill>
+                  <a:srgbClr val="002060"/>
+                </a:solidFill>
+              </a:rPr>
+              <a:t>ментальной карты (англ. </a:t>
+            </a:r>
+            <a:r>
+              <a:rPr lang="en-US" sz="2000" b="1" dirty="0">
+                <a:solidFill>
+                  <a:srgbClr val="002060"/>
+                </a:solidFill>
+              </a:rPr>
+              <a:t>Mind Map</a:t>
+            </a:r>
+            <a:r>
+              <a:rPr lang="ru-RU" sz="2000" b="1" dirty="0">
+                <a:solidFill>
+                  <a:srgbClr val="002060"/>
+                </a:solidFill>
+              </a:rPr>
+              <a:t>) </a:t>
+            </a:r>
+            <a:r>
+              <a:rPr lang="ru-RU" sz="2000" dirty="0">
+                <a:solidFill>
+                  <a:srgbClr val="002060"/>
+                </a:solidFill>
+              </a:rPr>
+              <a:t>плана задач, которые необходимо решить для достижения цели работы, выбран Сервис </a:t>
+            </a:r>
+            <a:r>
+              <a:rPr lang="en-US" sz="2000" b="1" dirty="0" err="1">
+                <a:solidFill>
+                  <a:srgbClr val="002060"/>
+                </a:solidFill>
+              </a:rPr>
+              <a:t>IOctopus</a:t>
+            </a:r>
+            <a:r>
+              <a:rPr lang="en-US" sz="2000" b="1" dirty="0">
+                <a:solidFill>
+                  <a:srgbClr val="002060"/>
+                </a:solidFill>
+              </a:rPr>
+              <a:t> </a:t>
+            </a:r>
+            <a:r>
+              <a:rPr lang="ru-RU" sz="2000" dirty="0">
+                <a:solidFill>
+                  <a:srgbClr val="002060"/>
+                </a:solidFill>
+              </a:rPr>
+              <a:t>(</a:t>
+            </a:r>
+            <a:r>
+              <a:rPr lang="en-US" sz="2000" dirty="0">
+                <a:solidFill>
+                  <a:srgbClr val="002060"/>
                 </a:solidFill>
                 <a:hlinkClick r:id="rId4">
                   <a:extLst>
@@ -29563,162 +29824,181 @@
                   </a:extLst>
                 </a:hlinkClick>
               </a:rPr>
-              <a:t>https://github.com/inna531/Fuzzy-Agile-Development</a:t>
-            </a:r>
-            <a:r>
-              <a:rPr lang="ru-RU" sz="1800" dirty="0">
-                <a:solidFill>
-                  <a:srgbClr val="FF0000"/>
-                </a:solidFill>
+              <a:t>https</a:t>
+            </a:r>
+            <a:r>
+              <a:rPr lang="ru-RU" sz="2000" dirty="0">
+                <a:solidFill>
+                  <a:srgbClr val="002060"/>
+                </a:solidFill>
+                <a:hlinkClick r:id="rId4">
+                  <a:extLst>
+                    <a:ext uri="{A12FA001-AC4F-418D-AE19-62706E023703}">
+                      <ahyp:hlinkClr xmlns:ahyp="http://schemas.microsoft.com/office/drawing/2018/hyperlinkcolor" val="tx"/>
+                    </a:ext>
+                  </a:extLst>
+                </a:hlinkClick>
+              </a:rPr>
+              <a:t>://</a:t>
+            </a:r>
+            <a:r>
+              <a:rPr lang="en-US" sz="2000" dirty="0">
+                <a:solidFill>
+                  <a:srgbClr val="002060"/>
+                </a:solidFill>
+                <a:hlinkClick r:id="rId4">
+                  <a:extLst>
+                    <a:ext uri="{A12FA001-AC4F-418D-AE19-62706E023703}">
+                      <ahyp:hlinkClr xmlns:ahyp="http://schemas.microsoft.com/office/drawing/2018/hyperlinkcolor" val="tx"/>
+                    </a:ext>
+                  </a:extLst>
+                </a:hlinkClick>
+              </a:rPr>
+              <a:t>mind</a:t>
+            </a:r>
+            <a:r>
+              <a:rPr lang="ru-RU" sz="2000" dirty="0">
+                <a:solidFill>
+                  <a:srgbClr val="002060"/>
+                </a:solidFill>
+                <a:hlinkClick r:id="rId4">
+                  <a:extLst>
+                    <a:ext uri="{A12FA001-AC4F-418D-AE19-62706E023703}">
+                      <ahyp:hlinkClr xmlns:ahyp="http://schemas.microsoft.com/office/drawing/2018/hyperlinkcolor" val="tx"/>
+                    </a:ext>
+                  </a:extLst>
+                </a:hlinkClick>
+              </a:rPr>
+              <a:t>-</a:t>
+            </a:r>
+            <a:r>
+              <a:rPr lang="en-US" sz="2000" dirty="0">
+                <a:solidFill>
+                  <a:srgbClr val="002060"/>
+                </a:solidFill>
+                <a:hlinkClick r:id="rId4">
+                  <a:extLst>
+                    <a:ext uri="{A12FA001-AC4F-418D-AE19-62706E023703}">
+                      <ahyp:hlinkClr xmlns:ahyp="http://schemas.microsoft.com/office/drawing/2018/hyperlinkcolor" val="tx"/>
+                    </a:ext>
+                  </a:extLst>
+                </a:hlinkClick>
+              </a:rPr>
+              <a:t>map</a:t>
+            </a:r>
+            <a:r>
+              <a:rPr lang="ru-RU" sz="2000" dirty="0">
+                <a:solidFill>
+                  <a:srgbClr val="002060"/>
+                </a:solidFill>
+                <a:hlinkClick r:id="rId4">
+                  <a:extLst>
+                    <a:ext uri="{A12FA001-AC4F-418D-AE19-62706E023703}">
+                      <ahyp:hlinkClr xmlns:ahyp="http://schemas.microsoft.com/office/drawing/2018/hyperlinkcolor" val="tx"/>
+                    </a:ext>
+                  </a:extLst>
+                </a:hlinkClick>
+              </a:rPr>
+              <a:t>-</a:t>
+            </a:r>
+            <a:r>
+              <a:rPr lang="en-US" sz="2000" dirty="0">
+                <a:solidFill>
+                  <a:srgbClr val="002060"/>
+                </a:solidFill>
+                <a:hlinkClick r:id="rId4">
+                  <a:extLst>
+                    <a:ext uri="{A12FA001-AC4F-418D-AE19-62706E023703}">
+                      <ahyp:hlinkClr xmlns:ahyp="http://schemas.microsoft.com/office/drawing/2018/hyperlinkcolor" val="tx"/>
+                    </a:ext>
+                  </a:extLst>
+                </a:hlinkClick>
+              </a:rPr>
+              <a:t>online</a:t>
+            </a:r>
+            <a:r>
+              <a:rPr lang="ru-RU" sz="2000" dirty="0">
+                <a:solidFill>
+                  <a:srgbClr val="002060"/>
+                </a:solidFill>
+                <a:hlinkClick r:id="rId4">
+                  <a:extLst>
+                    <a:ext uri="{A12FA001-AC4F-418D-AE19-62706E023703}">
+                      <ahyp:hlinkClr xmlns:ahyp="http://schemas.microsoft.com/office/drawing/2018/hyperlinkcolor" val="tx"/>
+                    </a:ext>
+                  </a:extLst>
+                </a:hlinkClick>
               </a:rPr>
               <a:t>.</a:t>
             </a:r>
-          </a:p>
-          <a:p>
-            <a:r>
-              <a:rPr lang="en-US" sz="1800" b="1" dirty="0">
-                <a:solidFill>
-                  <a:srgbClr val="FF0000"/>
-                </a:solidFill>
-              </a:rPr>
-              <a:t>PERT</a:t>
-            </a:r>
-            <a:r>
-              <a:rPr lang="ru-RU" sz="1800" b="1" dirty="0">
-                <a:solidFill>
-                  <a:srgbClr val="FF0000"/>
-                </a:solidFill>
-              </a:rPr>
-              <a:t> диаграмма</a:t>
-            </a:r>
-            <a:r>
-              <a:rPr lang="ru-RU" sz="1800" dirty="0">
-                <a:solidFill>
-                  <a:srgbClr val="FF0000"/>
-                </a:solidFill>
-              </a:rPr>
-              <a:t> проекта будет выполнена в таблице </a:t>
-            </a:r>
-            <a:r>
-              <a:rPr lang="en-US" sz="1800" dirty="0">
-                <a:solidFill>
-                  <a:srgbClr val="FF0000"/>
+            <a:r>
+              <a:rPr lang="en-US" sz="2000" dirty="0" err="1">
+                <a:solidFill>
+                  <a:srgbClr val="002060"/>
+                </a:solidFill>
+                <a:hlinkClick r:id="rId4">
+                  <a:extLst>
+                    <a:ext uri="{A12FA001-AC4F-418D-AE19-62706E023703}">
+                      <ahyp:hlinkClr xmlns:ahyp="http://schemas.microsoft.com/office/drawing/2018/hyperlinkcolor" val="tx"/>
+                    </a:ext>
+                  </a:extLst>
+                </a:hlinkClick>
+              </a:rPr>
+              <a:t>ru</a:t>
+            </a:r>
+            <a:r>
+              <a:rPr lang="ru-RU" sz="2000" dirty="0">
+                <a:solidFill>
+                  <a:srgbClr val="002060"/>
+                </a:solidFill>
+              </a:rPr>
+              <a:t>). </a:t>
+            </a:r>
+          </a:p>
+          <a:p>
+            <a:pPr marL="285750" indent="-285750">
+              <a:spcAft>
+                <a:spcPts val="600"/>
+              </a:spcAft>
+              <a:buFont typeface="Arial" panose="020B0604020202020204" pitchFamily="34" charset="0"/>
+              <a:buChar char="•"/>
+            </a:pPr>
+            <a:r>
+              <a:rPr lang="ru-RU" sz="2000" dirty="0">
+                <a:solidFill>
+                  <a:srgbClr val="002060"/>
+                </a:solidFill>
+              </a:rPr>
+              <a:t>Для построения </a:t>
+            </a:r>
+            <a:r>
+              <a:rPr lang="ru-RU" sz="2000" b="1" dirty="0">
+                <a:solidFill>
+                  <a:srgbClr val="002060"/>
+                </a:solidFill>
+              </a:rPr>
+              <a:t>«дерева источников» </a:t>
+            </a:r>
+            <a:r>
+              <a:rPr lang="ru-RU" sz="2000" dirty="0">
+                <a:solidFill>
+                  <a:srgbClr val="002060"/>
+                </a:solidFill>
+              </a:rPr>
+              <a:t>использованы электронные таблицы </a:t>
+            </a:r>
+            <a:r>
+              <a:rPr lang="en-US" sz="2000" dirty="0">
+                <a:solidFill>
+                  <a:srgbClr val="002060"/>
                 </a:solidFill>
               </a:rPr>
               <a:t>Excel</a:t>
             </a:r>
             <a:r>
-              <a:rPr lang="ru-RU" sz="1800" dirty="0">
-                <a:solidFill>
-                  <a:srgbClr val="FF0000"/>
-                </a:solidFill>
-              </a:rPr>
-              <a:t>, что позволит оперативно корректировать план работы над исследованием.</a:t>
-            </a:r>
-          </a:p>
-          <a:p>
-            <a:r>
-              <a:rPr lang="ru-RU" sz="1800" dirty="0">
-                <a:solidFill>
-                  <a:srgbClr val="FF0000"/>
-                </a:solidFill>
-              </a:rPr>
-              <a:t>Инструмент для построения </a:t>
-            </a:r>
-            <a:r>
-              <a:rPr lang="ru-RU" sz="1800" b="1" dirty="0">
-                <a:solidFill>
-                  <a:srgbClr val="FF0000"/>
-                </a:solidFill>
-              </a:rPr>
-              <a:t>ментальной карты</a:t>
-            </a:r>
-            <a:r>
-              <a:rPr lang="ru-RU" sz="1800" dirty="0">
-                <a:solidFill>
-                  <a:srgbClr val="FF0000"/>
-                </a:solidFill>
-              </a:rPr>
-              <a:t> (англ.</a:t>
-            </a:r>
-            <a:r>
-              <a:rPr lang="ru-RU" sz="1800" i="1" dirty="0">
-                <a:solidFill>
-                  <a:srgbClr val="FF0000"/>
-                </a:solidFill>
-              </a:rPr>
-              <a:t> </a:t>
-            </a:r>
-            <a:r>
-              <a:rPr lang="en-US" sz="1800" i="1" dirty="0">
-                <a:solidFill>
-                  <a:srgbClr val="FF0000"/>
-                </a:solidFill>
-              </a:rPr>
-              <a:t>Mind Map</a:t>
-            </a:r>
-            <a:r>
-              <a:rPr lang="ru-RU" sz="1800" dirty="0">
-                <a:solidFill>
-                  <a:srgbClr val="FF0000"/>
-                </a:solidFill>
-              </a:rPr>
-              <a:t>) еще предстоит выбрать.</a:t>
-            </a:r>
-          </a:p>
-          <a:p>
-            <a:r>
-              <a:rPr lang="ru-RU" sz="1800" dirty="0">
-                <a:solidFill>
-                  <a:srgbClr val="FF0000"/>
-                </a:solidFill>
-              </a:rPr>
-              <a:t>Для построения </a:t>
-            </a:r>
-            <a:r>
-              <a:rPr lang="ru-RU" sz="1800" b="1" dirty="0">
-                <a:solidFill>
-                  <a:srgbClr val="FF0000"/>
-                </a:solidFill>
-              </a:rPr>
-              <a:t>«дерева источников»</a:t>
-            </a:r>
-            <a:r>
-              <a:rPr lang="ru-RU" sz="1800" dirty="0">
-                <a:solidFill>
-                  <a:srgbClr val="FF0000"/>
-                </a:solidFill>
-              </a:rPr>
-              <a:t> (в разделе Список источников (</a:t>
-            </a:r>
-            <a:r>
-              <a:rPr lang="ru-RU" sz="1800" dirty="0" err="1">
-                <a:solidFill>
-                  <a:srgbClr val="FF0000"/>
-                </a:solidFill>
-              </a:rPr>
-              <a:t>references</a:t>
-            </a:r>
-            <a:r>
-              <a:rPr lang="ru-RU" sz="1800" dirty="0">
-                <a:solidFill>
-                  <a:srgbClr val="FF0000"/>
-                </a:solidFill>
-              </a:rPr>
-              <a:t>)) использованы электронные таблицы </a:t>
-            </a:r>
-            <a:r>
-              <a:rPr lang="en-US" sz="1800" dirty="0">
-                <a:solidFill>
-                  <a:srgbClr val="FF0000"/>
-                </a:solidFill>
-              </a:rPr>
-              <a:t>Excel</a:t>
-            </a:r>
-            <a:r>
-              <a:rPr lang="ru-RU" sz="1800" dirty="0">
-                <a:solidFill>
-                  <a:srgbClr val="FF0000"/>
+              <a:rPr lang="ru-RU" sz="2000" dirty="0">
+                <a:solidFill>
+                  <a:srgbClr val="002060"/>
                 </a:solidFill>
               </a:rPr>
               <a:t> – инструмент, позволяющий просто и наглядно проиллюстрировать работу с используемой литературой. Также для анализа исследований по теме работы будет использован индекс цитируемости источников.</a:t>
@@ -31103,8 +31383,8 @@
         </p:nvSpPr>
         <p:spPr>
           <a:xfrm>
-            <a:off x="553375" y="1745225"/>
-            <a:ext cx="10851900" cy="4576200"/>
+            <a:off x="459068" y="1733080"/>
+            <a:ext cx="11273864" cy="4576200"/>
           </a:xfrm>
           <a:prstGeom prst="rect">
             <a:avLst/>
@@ -31120,11 +31400,32 @@
           </a:bodyPr>
           <a:lstStyle/>
           <a:p>
-            <a:pPr lvl="0"/>
+            <a:pPr>
+              <a:spcAft>
+                <a:spcPts val="600"/>
+              </a:spcAft>
+            </a:pPr>
+            <a:r>
+              <a:rPr lang="ru-RU" b="1" u="sng" dirty="0">
+                <a:solidFill>
+                  <a:srgbClr val="002060"/>
+                </a:solidFill>
+              </a:rPr>
+              <a:t>Контрольные точки проекта</a:t>
+            </a:r>
+          </a:p>
+          <a:p>
+            <a:pPr marL="285750" lvl="0" indent="-285750">
+              <a:spcAft>
+                <a:spcPts val="600"/>
+              </a:spcAft>
+              <a:buFont typeface="Arial" panose="020B0604020202020204" pitchFamily="34" charset="0"/>
+              <a:buChar char="•"/>
+            </a:pPr>
             <a:r>
               <a:rPr lang="ru-RU" b="1" dirty="0">
                 <a:solidFill>
-                  <a:srgbClr val="FF0000"/>
+                  <a:srgbClr val="002060"/>
                 </a:solidFill>
               </a:rPr>
               <a:t>Формулировка и утверждение темы</a:t>
@@ -31132,18 +31433,40 @@
             <a:r>
               <a:rPr lang="ru-RU" dirty="0">
                 <a:solidFill>
-                  <a:srgbClr val="FF0000"/>
-                </a:solidFill>
-              </a:rPr>
-              <a:t> выпускной работы магистра – 15.11.2025;</a:t>
-            </a:r>
-          </a:p>
-          <a:p>
-            <a:pPr lvl="0"/>
+                  <a:srgbClr val="002060"/>
+                </a:solidFill>
+              </a:rPr>
+              <a:t> выпускной работы магистра - </a:t>
+            </a:r>
             <a:r>
               <a:rPr lang="ru-RU" b="1" dirty="0">
                 <a:solidFill>
-                  <a:srgbClr val="FF0000"/>
+                  <a:srgbClr val="00B050"/>
+                </a:solidFill>
+              </a:rPr>
+              <a:t>15.11.2025</a:t>
+            </a:r>
+            <a:r>
+              <a:rPr lang="ru-RU" dirty="0">
+                <a:solidFill>
+                  <a:srgbClr val="002060"/>
+                </a:solidFill>
+              </a:rPr>
+              <a:t> (выполнено)</a:t>
+            </a:r>
+          </a:p>
+          <a:p>
+            <a:pPr marL="285750" lvl="0" indent="-285750">
+              <a:spcAft>
+                <a:spcPts val="600"/>
+              </a:spcAft>
+              <a:buFont typeface="Arial" panose="020B0604020202020204" pitchFamily="34" charset="0"/>
+              <a:buChar char="•"/>
+            </a:pPr>
+            <a:r>
+              <a:rPr lang="ru-RU" b="1" dirty="0">
+                <a:solidFill>
+                  <a:srgbClr val="002060"/>
                 </a:solidFill>
               </a:rPr>
               <a:t>Создание репозитория на </a:t>
@@ -31151,7 +31474,7 @@
             <a:r>
               <a:rPr lang="en-US" b="1" dirty="0">
                 <a:solidFill>
-                  <a:srgbClr val="FF0000"/>
+                  <a:srgbClr val="002060"/>
                 </a:solidFill>
               </a:rPr>
               <a:t>GitHub</a:t>
@@ -31159,15 +31482,234 @@
             <a:r>
               <a:rPr lang="ru-RU" dirty="0">
                 <a:solidFill>
-                  <a:srgbClr val="FF0000"/>
-                </a:solidFill>
-              </a:rPr>
-              <a:t>, размещение документации (собранных исследовательских статей, таблицы с «деревом источников», файла описания проекта (</a:t>
+                  <a:srgbClr val="002060"/>
+                </a:solidFill>
+              </a:rPr>
+              <a:t>, размещение документации – </a:t>
+            </a:r>
+            <a:r>
+              <a:rPr lang="ru-RU" b="1" dirty="0">
+                <a:solidFill>
+                  <a:srgbClr val="00B050"/>
+                </a:solidFill>
+              </a:rPr>
+              <a:t>18.11.2025</a:t>
+            </a:r>
+            <a:r>
+              <a:rPr lang="ru-RU" dirty="0">
+                <a:solidFill>
+                  <a:srgbClr val="002060"/>
+                </a:solidFill>
+              </a:rPr>
+              <a:t> (выполнено)</a:t>
+            </a:r>
+          </a:p>
+          <a:p>
+            <a:pPr marL="285750" lvl="0" indent="-285750">
+              <a:spcAft>
+                <a:spcPts val="600"/>
+              </a:spcAft>
+              <a:buFont typeface="Arial" panose="020B0604020202020204" pitchFamily="34" charset="0"/>
+              <a:buChar char="•"/>
+            </a:pPr>
+            <a:r>
+              <a:rPr lang="ru-RU" dirty="0">
+                <a:solidFill>
+                  <a:srgbClr val="002060"/>
+                </a:solidFill>
+              </a:rPr>
+              <a:t>Изучение предметной области и постановка задачи, сбор литературы по теме исследования, предмета и объекта исследования, формулировка цели, исследовательских вопросов, задач, планируемых результатов работы и перспектив дальнейших исследований, определение методов (подходов) и инструментов исследования – </a:t>
+            </a:r>
+            <a:r>
+              <a:rPr lang="ru-RU" b="1" dirty="0">
+                <a:solidFill>
+                  <a:srgbClr val="002060"/>
+                </a:solidFill>
+              </a:rPr>
+              <a:t>формирование предварительного описания проекта (</a:t>
+            </a:r>
+            <a:r>
+              <a:rPr lang="en-US" b="1" dirty="0">
+                <a:solidFill>
+                  <a:srgbClr val="002060"/>
+                </a:solidFill>
+              </a:rPr>
+              <a:t>Project Proposal</a:t>
+            </a:r>
+            <a:r>
+              <a:rPr lang="ru-RU" b="1" dirty="0">
+                <a:solidFill>
+                  <a:srgbClr val="002060"/>
+                </a:solidFill>
+              </a:rPr>
+              <a:t>)</a:t>
+            </a:r>
+            <a:r>
+              <a:rPr lang="ru-RU" dirty="0">
+                <a:solidFill>
+                  <a:srgbClr val="002060"/>
+                </a:solidFill>
+              </a:rPr>
+              <a:t> </a:t>
+            </a:r>
+            <a:r>
+              <a:rPr lang="ru-RU" dirty="0">
+                <a:solidFill>
+                  <a:srgbClr val="00B050"/>
+                </a:solidFill>
+              </a:rPr>
+              <a:t>– </a:t>
+            </a:r>
+            <a:r>
+              <a:rPr lang="ru-RU" b="1" dirty="0">
+                <a:solidFill>
+                  <a:srgbClr val="00B050"/>
+                </a:solidFill>
+              </a:rPr>
+              <a:t>01.12.2025 </a:t>
+            </a:r>
+            <a:r>
+              <a:rPr lang="ru-RU" dirty="0">
+                <a:solidFill>
+                  <a:srgbClr val="002060"/>
+                </a:solidFill>
+              </a:rPr>
+              <a:t>(выполнено)</a:t>
+            </a:r>
+          </a:p>
+          <a:p>
+            <a:pPr marL="285750" lvl="0" indent="-285750">
+              <a:spcAft>
+                <a:spcPts val="600"/>
+              </a:spcAft>
+              <a:buFont typeface="Arial" panose="020B0604020202020204" pitchFamily="34" charset="0"/>
+              <a:buChar char="•"/>
+            </a:pPr>
+            <a:r>
+              <a:rPr lang="ru-RU" dirty="0">
+                <a:solidFill>
+                  <a:srgbClr val="002060"/>
+                </a:solidFill>
+              </a:rPr>
+              <a:t>Работа с вспомогательными инструментами планирования и визуализации результатов работы над проектом, создание первоначального </a:t>
+            </a:r>
+            <a:r>
+              <a:rPr lang="ru-RU" b="1" dirty="0">
+                <a:solidFill>
+                  <a:srgbClr val="002060"/>
+                </a:solidFill>
+              </a:rPr>
+              <a:t>«дерева источников»</a:t>
+            </a:r>
+            <a:r>
+              <a:rPr lang="ru-RU" dirty="0">
+                <a:solidFill>
+                  <a:srgbClr val="002060"/>
+                </a:solidFill>
+              </a:rPr>
+              <a:t>, первой </a:t>
+            </a:r>
+            <a:r>
+              <a:rPr lang="ru-RU" b="1" dirty="0">
+                <a:solidFill>
+                  <a:srgbClr val="002060"/>
+                </a:solidFill>
+              </a:rPr>
+              <a:t>ментальной карты (</a:t>
+            </a:r>
+            <a:r>
+              <a:rPr lang="en-US" b="1" dirty="0">
+                <a:solidFill>
+                  <a:srgbClr val="002060"/>
+                </a:solidFill>
+              </a:rPr>
+              <a:t>Mind Map</a:t>
+            </a:r>
+            <a:r>
+              <a:rPr lang="ru-RU" b="1" dirty="0">
+                <a:solidFill>
+                  <a:srgbClr val="002060"/>
+                </a:solidFill>
+              </a:rPr>
+              <a:t>)</a:t>
+            </a:r>
+            <a:r>
+              <a:rPr lang="ru-RU" dirty="0">
+                <a:solidFill>
+                  <a:srgbClr val="002060"/>
+                </a:solidFill>
+              </a:rPr>
+              <a:t> целей проекта, предварительной </a:t>
+            </a:r>
+            <a:r>
+              <a:rPr lang="en-US" b="1" dirty="0">
+                <a:solidFill>
+                  <a:srgbClr val="002060"/>
+                </a:solidFill>
+              </a:rPr>
+              <a:t>PERT</a:t>
+            </a:r>
+            <a:r>
+              <a:rPr lang="ru-RU" b="1" dirty="0">
+                <a:solidFill>
+                  <a:srgbClr val="002060"/>
+                </a:solidFill>
+              </a:rPr>
+              <a:t>- диаграммы</a:t>
+            </a:r>
+            <a:r>
+              <a:rPr lang="ru-RU" dirty="0">
+                <a:solidFill>
+                  <a:srgbClr val="002060"/>
+                </a:solidFill>
+              </a:rPr>
+              <a:t> </a:t>
+            </a:r>
+            <a:r>
+              <a:rPr lang="ru-RU" b="1" dirty="0">
+                <a:solidFill>
+                  <a:srgbClr val="00B050"/>
+                </a:solidFill>
+              </a:rPr>
+              <a:t>– 01.12.2025 </a:t>
+            </a:r>
+            <a:r>
+              <a:rPr lang="ru-RU" dirty="0">
+                <a:solidFill>
+                  <a:srgbClr val="002060"/>
+                </a:solidFill>
+              </a:rPr>
+              <a:t>(выполнено)</a:t>
+            </a:r>
+          </a:p>
+          <a:p>
+            <a:pPr marL="285750" lvl="0" indent="-285750">
+              <a:spcAft>
+                <a:spcPts val="600"/>
+              </a:spcAft>
+              <a:buFont typeface="Arial" panose="020B0604020202020204" pitchFamily="34" charset="0"/>
+              <a:buChar char="•"/>
+            </a:pPr>
+            <a:r>
+              <a:rPr lang="ru-RU" b="1" dirty="0">
+                <a:solidFill>
+                  <a:srgbClr val="002060"/>
+                </a:solidFill>
+              </a:rPr>
+              <a:t>Презентация предварительного описания проекта</a:t>
+            </a:r>
+            <a:r>
+              <a:rPr lang="ru-RU" dirty="0">
+                <a:solidFill>
+                  <a:srgbClr val="002060"/>
+                </a:solidFill>
+              </a:rPr>
+              <a:t> (</a:t>
             </a:r>
             <a:r>
               <a:rPr lang="en-US" dirty="0">
                 <a:solidFill>
-                  <a:srgbClr val="FF0000"/>
+                  <a:srgbClr val="002060"/>
                 </a:solidFill>
               </a:rPr>
               <a:t>Project Proposal</a:t>
@@ -31175,223 +31717,163 @@
             <a:r>
               <a:rPr lang="ru-RU" dirty="0">
                 <a:solidFill>
-                  <a:srgbClr val="FF0000"/>
-                </a:solidFill>
-              </a:rPr>
-              <a:t>) для дальнейшего дополнения и корректировки материалов в процессе работы над исследованием) – </a:t>
+                  <a:srgbClr val="002060"/>
+                </a:solidFill>
+              </a:rPr>
+              <a:t>) – </a:t>
             </a:r>
             <a:r>
               <a:rPr lang="ru-RU" b="1" dirty="0">
                 <a:solidFill>
-                  <a:srgbClr val="FF0000"/>
-                </a:solidFill>
-              </a:rPr>
-              <a:t>18.11.2025</a:t>
+                  <a:srgbClr val="00B0F0"/>
+                </a:solidFill>
+              </a:rPr>
+              <a:t>04.12.2025</a:t>
+            </a:r>
+          </a:p>
+          <a:p>
+            <a:pPr marL="285750" lvl="0" indent="-285750">
+              <a:spcAft>
+                <a:spcPts val="600"/>
+              </a:spcAft>
+              <a:buFont typeface="Arial" panose="020B0604020202020204" pitchFamily="34" charset="0"/>
+              <a:buChar char="•"/>
+            </a:pPr>
+            <a:r>
+              <a:rPr lang="ru-RU" b="1" dirty="0">
+                <a:solidFill>
+                  <a:srgbClr val="002060"/>
+                </a:solidFill>
+              </a:rPr>
+              <a:t>Контрольная точка 1:</a:t>
             </a:r>
             <a:r>
               <a:rPr lang="ru-RU" dirty="0">
                 <a:solidFill>
-                  <a:srgbClr val="FF0000"/>
-                </a:solidFill>
-              </a:rPr>
-              <a:t>;</a:t>
-            </a:r>
-          </a:p>
-          <a:p>
-            <a:pPr lvl="0"/>
+                  <a:srgbClr val="002060"/>
+                </a:solidFill>
+              </a:rPr>
+              <a:t> презентация прогресса работы и обратная связь от экспертов. На этом этапе должны быть сформулирован цели, задачи, гипотезы. Определена методология и используемый технологический стек - </a:t>
+            </a:r>
+            <a:r>
+              <a:rPr lang="ru-RU" b="1" dirty="0">
+                <a:solidFill>
+                  <a:srgbClr val="00B0F0"/>
+                </a:solidFill>
+              </a:rPr>
+              <a:t>середина марта 2026</a:t>
+            </a:r>
+          </a:p>
+          <a:p>
+            <a:pPr marL="285750" lvl="0" indent="-285750">
+              <a:spcAft>
+                <a:spcPts val="600"/>
+              </a:spcAft>
+              <a:buFont typeface="Arial" panose="020B0604020202020204" pitchFamily="34" charset="0"/>
+              <a:buChar char="•"/>
+            </a:pPr>
+            <a:r>
+              <a:rPr lang="ru-RU" b="1" dirty="0">
+                <a:solidFill>
+                  <a:srgbClr val="002060"/>
+                </a:solidFill>
+              </a:rPr>
+              <a:t>Контрольная точка 2:</a:t>
+            </a:r>
             <a:r>
               <a:rPr lang="ru-RU" dirty="0">
                 <a:solidFill>
-                  <a:srgbClr val="FF0000"/>
-                </a:solidFill>
-              </a:rPr>
-              <a:t>Изучение предметной области и постановка задачи, сбор литературы по теме исследования, предмета и объекта исследования, формулировка цели, исследовательских вопросов, задач, планируемых результатов работы и перспектив дальнейших исследований, определение методов (подходов) и инструментов исследования – </a:t>
+                  <a:srgbClr val="002060"/>
+                </a:solidFill>
+              </a:rPr>
+              <a:t> предварительная защита работы и обратная связь от экспертов. На этом этапе основная часть работы практически выполнена. Готовность работы 80% - </a:t>
             </a:r>
             <a:r>
               <a:rPr lang="ru-RU" b="1" dirty="0">
                 <a:solidFill>
-                  <a:srgbClr val="FF0000"/>
-                </a:solidFill>
-              </a:rPr>
-              <a:t>формирование предварительного описания проекта (</a:t>
-            </a:r>
-            <a:r>
-              <a:rPr lang="en-US" b="1" dirty="0">
-                <a:solidFill>
-                  <a:srgbClr val="FF0000"/>
-                </a:solidFill>
-              </a:rPr>
-              <a:t>Project Proposal</a:t>
-            </a:r>
+                  <a:srgbClr val="00B0F0"/>
+                </a:solidFill>
+              </a:rPr>
+              <a:t>конец апреля 2026</a:t>
+            </a:r>
+            <a:endParaRPr lang="ru-RU" b="1" dirty="0">
+              <a:solidFill>
+                <a:srgbClr val="002060"/>
+              </a:solidFill>
+            </a:endParaRPr>
+          </a:p>
+          <a:p>
+            <a:pPr marL="285750" lvl="0" indent="-285750">
+              <a:spcAft>
+                <a:spcPts val="600"/>
+              </a:spcAft>
+              <a:buFont typeface="Arial" panose="020B0604020202020204" pitchFamily="34" charset="0"/>
+              <a:buChar char="•"/>
+            </a:pPr>
             <a:r>
               <a:rPr lang="ru-RU" b="1" dirty="0">
                 <a:solidFill>
-                  <a:srgbClr val="FF0000"/>
-                </a:solidFill>
-              </a:rPr>
-              <a:t>)</a:t>
+                  <a:srgbClr val="002060"/>
+                </a:solidFill>
+              </a:rPr>
+              <a:t>Представление завершенной работы научному руководителю</a:t>
             </a:r>
             <a:r>
               <a:rPr lang="ru-RU" dirty="0">
                 <a:solidFill>
-                  <a:srgbClr val="FF0000"/>
-                </a:solidFill>
-              </a:rPr>
-              <a:t> – 01.12.2025;</a:t>
-            </a:r>
-          </a:p>
-          <a:p>
-            <a:pPr lvl="0"/>
+                  <a:srgbClr val="002060"/>
+                </a:solidFill>
+              </a:rPr>
+              <a:t> - </a:t>
+            </a:r>
+            <a:r>
+              <a:rPr lang="ru-RU" b="1" dirty="0">
+                <a:solidFill>
+                  <a:srgbClr val="00B0F0"/>
+                </a:solidFill>
+              </a:rPr>
+              <a:t>середина мая 2026</a:t>
+            </a:r>
+          </a:p>
+          <a:p>
+            <a:pPr marL="285750" lvl="0" indent="-285750">
+              <a:spcAft>
+                <a:spcPts val="600"/>
+              </a:spcAft>
+              <a:buFont typeface="Arial" panose="020B0604020202020204" pitchFamily="34" charset="0"/>
+              <a:buChar char="•"/>
+            </a:pPr>
+            <a:r>
+              <a:rPr lang="ru-RU" b="1" dirty="0">
+                <a:solidFill>
+                  <a:srgbClr val="002060"/>
+                </a:solidFill>
+              </a:rPr>
+              <a:t>Подготовка презентационных материалов. Защита работы</a:t>
+            </a:r>
             <a:r>
               <a:rPr lang="ru-RU" dirty="0">
                 <a:solidFill>
-                  <a:srgbClr val="FF0000"/>
-                </a:solidFill>
-              </a:rPr>
-              <a:t>Работа с вспомогательными инструментами планирования и визуализации результатов работы над проектом, создание первой ментальной карты (</a:t>
-            </a:r>
-            <a:r>
-              <a:rPr lang="en-US" dirty="0">
-                <a:solidFill>
-                  <a:srgbClr val="FF0000"/>
-                </a:solidFill>
-              </a:rPr>
-              <a:t>Mind Map</a:t>
-            </a:r>
-            <a:r>
-              <a:rPr lang="ru-RU" dirty="0">
-                <a:solidFill>
-                  <a:srgbClr val="FF0000"/>
-                </a:solidFill>
-              </a:rPr>
-              <a:t>) целей проекта, предварительной </a:t>
-            </a:r>
-            <a:r>
-              <a:rPr lang="en-US" dirty="0">
-                <a:solidFill>
-                  <a:srgbClr val="FF0000"/>
-                </a:solidFill>
-              </a:rPr>
-              <a:t>PERT</a:t>
-            </a:r>
-            <a:r>
-              <a:rPr lang="ru-RU" dirty="0">
-                <a:solidFill>
-                  <a:srgbClr val="FF0000"/>
-                </a:solidFill>
-              </a:rPr>
-              <a:t>- диаграммы – 04.12.2025;</a:t>
-            </a:r>
-          </a:p>
-          <a:p>
-            <a:pPr lvl="0"/>
+                  <a:srgbClr val="002060"/>
+                </a:solidFill>
+              </a:rPr>
+              <a:t> </a:t>
+            </a:r>
             <a:r>
               <a:rPr lang="ru-RU" b="1" dirty="0">
                 <a:solidFill>
-                  <a:srgbClr val="FF0000"/>
-                </a:solidFill>
-              </a:rPr>
-              <a:t>Презентация предварительного описания проекта</a:t>
-            </a:r>
-            <a:r>
-              <a:rPr lang="ru-RU" dirty="0">
-                <a:solidFill>
-                  <a:srgbClr val="FF0000"/>
-                </a:solidFill>
-              </a:rPr>
-              <a:t> (</a:t>
-            </a:r>
-            <a:r>
-              <a:rPr lang="en-US" dirty="0">
-                <a:solidFill>
-                  <a:srgbClr val="FF0000"/>
-                </a:solidFill>
-              </a:rPr>
-              <a:t>Project Proposal</a:t>
-            </a:r>
-            <a:r>
-              <a:rPr lang="ru-RU" dirty="0">
-                <a:solidFill>
-                  <a:srgbClr val="FF0000"/>
-                </a:solidFill>
-              </a:rPr>
-              <a:t>) – 04.12.2025;</a:t>
-            </a:r>
-          </a:p>
-          <a:p>
-            <a:pPr lvl="0"/>
+                  <a:srgbClr val="002060"/>
+                </a:solidFill>
+              </a:rPr>
+              <a:t>- </a:t>
+            </a:r>
             <a:r>
               <a:rPr lang="ru-RU" b="1" dirty="0">
                 <a:solidFill>
-                  <a:srgbClr val="FF0000"/>
-                </a:solidFill>
-              </a:rPr>
-              <a:t>Контрольная точка 1:</a:t>
-            </a:r>
-            <a:r>
-              <a:rPr lang="ru-RU" dirty="0">
-                <a:solidFill>
-                  <a:srgbClr val="FF0000"/>
-                </a:solidFill>
-              </a:rPr>
-              <a:t> презентация прогресса работы и обратная связь от экспертов. На этом этапе должны быть сформулирован цели, задачи, гипотезы. Определена методология и используемый технологический стек - середина марта 2026;</a:t>
-            </a:r>
-          </a:p>
-          <a:p>
-            <a:pPr lvl="0"/>
-            <a:r>
-              <a:rPr lang="ru-RU" b="1" dirty="0">
-                <a:solidFill>
-                  <a:srgbClr val="FF0000"/>
-                </a:solidFill>
-              </a:rPr>
-              <a:t>Контрольная точка 2:</a:t>
-            </a:r>
-            <a:r>
-              <a:rPr lang="ru-RU" dirty="0">
-                <a:solidFill>
-                  <a:srgbClr val="FF0000"/>
-                </a:solidFill>
-              </a:rPr>
-              <a:t> предварительная защита работы и обратная связь от экспертов. На этом этапе основная часть работы практически выполнена. Готовность работы 80% - конец апреля 2026;</a:t>
-            </a:r>
-          </a:p>
-          <a:p>
-            <a:pPr lvl="0"/>
-            <a:r>
-              <a:rPr lang="ru-RU" b="1" dirty="0">
-                <a:solidFill>
-                  <a:srgbClr val="FF0000"/>
-                </a:solidFill>
-              </a:rPr>
-              <a:t>Представление завершенной работы научному руководителю</a:t>
-            </a:r>
-            <a:r>
-              <a:rPr lang="ru-RU" dirty="0">
-                <a:solidFill>
-                  <a:srgbClr val="FF0000"/>
-                </a:solidFill>
-              </a:rPr>
-              <a:t> - середина мая 2026;</a:t>
-            </a:r>
-          </a:p>
-          <a:p>
-            <a:pPr lvl="0"/>
-            <a:r>
-              <a:rPr lang="ru-RU" b="1" dirty="0">
-                <a:solidFill>
-                  <a:srgbClr val="FF0000"/>
-                </a:solidFill>
-              </a:rPr>
-              <a:t>Подготовка презентационных материалов. Защита работы</a:t>
-            </a:r>
-            <a:r>
-              <a:rPr lang="ru-RU" dirty="0">
-                <a:solidFill>
-                  <a:srgbClr val="FF0000"/>
-                </a:solidFill>
-              </a:rPr>
-              <a:t> - июнь 2026.</a:t>
+                  <a:srgbClr val="00B0F0"/>
+                </a:solidFill>
+              </a:rPr>
+              <a:t>июнь 2026</a:t>
             </a:r>
           </a:p>
         </p:txBody>
@@ -32258,14 +32740,14 @@
             <a:r>
               <a:rPr lang="en-US" sz="1600" dirty="0">
                 <a:solidFill>
-                  <a:srgbClr val="FF0000"/>
+                  <a:srgbClr val="002060"/>
                 </a:solidFill>
               </a:rPr>
               <a:t>1. Khan A. A., Shameem M., Nadeem M., Akbar M. A. Agile trends in Chinese global software development industry: Fuzzy AHP based conceptual mapping //Applied Soft Computing, 2021, 102 (107090), P. 24.</a:t>
             </a:r>
             <a:endParaRPr lang="ru-RU" sz="1600" dirty="0">
               <a:solidFill>
-                <a:srgbClr val="FF0000"/>
+                <a:srgbClr val="002060"/>
               </a:solidFill>
             </a:endParaRPr>
           </a:p>
@@ -32281,22 +32763,14 @@
             <a:r>
               <a:rPr lang="en-US" sz="1600" dirty="0">
                 <a:solidFill>
-                  <a:srgbClr val="FF0000"/>
-                </a:solidFill>
-              </a:rPr>
-              <a:t>2. </a:t>
-            </a:r>
-            <a:r>
-              <a:rPr lang="en-US" sz="1600" b="1" dirty="0">
-                <a:solidFill>
-                  <a:srgbClr val="FF0000"/>
-                </a:solidFill>
-              </a:rPr>
-              <a:t>Saini A., Ahuja L., Khatri S. K. Effort estimation of agile development using fuzzy logic //2018 7th International Conference on Reliability, Infocom Technologies and Optimization (Trends and Future Directions) (ICRITO). – IEEE, 2018, P. 779-783.</a:t>
+                  <a:srgbClr val="002060"/>
+                </a:solidFill>
+              </a:rPr>
+              <a:t>2. Saini A., Ahuja L., Khatri S. K. Effort estimation of agile development using fuzzy logic //2018 7th International Conference on Reliability, Infocom Technologies and Optimization (Trends and Future Directions) (ICRITO). – IEEE, 2018, P. 779-783.</a:t>
             </a:r>
             <a:endParaRPr lang="ru-RU" sz="1600" dirty="0">
               <a:solidFill>
-                <a:srgbClr val="FF0000"/>
+                <a:srgbClr val="002060"/>
               </a:solidFill>
             </a:endParaRPr>
           </a:p>
@@ -32312,7 +32786,7 @@
             <a:r>
               <a:rPr lang="en-US" sz="1600" dirty="0">
                 <a:solidFill>
-                  <a:srgbClr val="FF0000"/>
+                  <a:srgbClr val="002060"/>
                 </a:solidFill>
               </a:rPr>
               <a:t>3. </a:t>
@@ -32320,14 +32794,14 @@
             <a:r>
               <a:rPr lang="en-US" sz="1600" u="sng" dirty="0">
                 <a:solidFill>
-                  <a:srgbClr val="FF0000"/>
+                  <a:srgbClr val="002060"/>
                 </a:solidFill>
               </a:rPr>
               <a:t>Lin C.T., Chiu H., Tseng Y.H. Agility evaluation using fuzzy logic //International journal of production economics, 2006, 101 (2), P. 353-368.</a:t>
             </a:r>
             <a:endParaRPr lang="ru-RU" sz="1600" dirty="0">
               <a:solidFill>
-                <a:srgbClr val="FF0000"/>
+                <a:srgbClr val="002060"/>
               </a:solidFill>
             </a:endParaRPr>
           </a:p>
@@ -32343,7 +32817,7 @@
             <a:r>
               <a:rPr lang="en-US" sz="1600" dirty="0">
                 <a:solidFill>
-                  <a:srgbClr val="FF0000"/>
+                  <a:srgbClr val="002060"/>
                 </a:solidFill>
               </a:rPr>
               <a:t>4. Marín Díaz G, </a:t>
@@ -32351,7 +32825,7 @@
             <a:r>
               <a:rPr lang="en-US" sz="1600" dirty="0" err="1">
                 <a:solidFill>
-                  <a:srgbClr val="FF0000"/>
+                  <a:srgbClr val="002060"/>
                 </a:solidFill>
               </a:rPr>
               <a:t>Galdón</a:t>
@@ -32359,7 +32833,7 @@
             <a:r>
               <a:rPr lang="en-US" sz="1600" dirty="0">
                 <a:solidFill>
-                  <a:srgbClr val="FF0000"/>
+                  <a:srgbClr val="002060"/>
                 </a:solidFill>
               </a:rPr>
               <a:t> Salvador JL. Group Decision-Making Model Based on 2-Tuple Fuzzy Linguistic Model and AHP Applied to Measuring Digital Maturity Level of Organizations // Systems, 2023, 11(7):341, P. 32, </a:t>
@@ -32367,7 +32841,7 @@
             <a:r>
               <a:rPr lang="en-US" sz="1600" u="sng" dirty="0">
                 <a:solidFill>
-                  <a:srgbClr val="FF0000"/>
+                  <a:srgbClr val="002060"/>
                 </a:solidFill>
                 <a:hlinkClick r:id="rId3">
                   <a:extLst>
@@ -32382,7 +32856,7 @@
             <a:r>
               <a:rPr lang="ru-RU" sz="1600" dirty="0">
                 <a:solidFill>
-                  <a:srgbClr val="FF0000"/>
+                  <a:srgbClr val="002060"/>
                 </a:solidFill>
               </a:rPr>
               <a:t> </a:t>
@@ -32400,14 +32874,14 @@
             <a:r>
               <a:rPr lang="en-US" sz="1600" dirty="0">
                 <a:solidFill>
-                  <a:srgbClr val="FF0000"/>
+                  <a:srgbClr val="002060"/>
                 </a:solidFill>
               </a:rPr>
               <a:t>5. Yan W., Chen C. H., Khoo L. P. An integrated approach to the elicitation of customer requirements for engineering design using picture sorts and fuzzy evaluation //Ai Edam, 2002, 16 (2), P. 59-71.</a:t>
             </a:r>
             <a:endParaRPr lang="ru-RU" sz="1600" dirty="0">
               <a:solidFill>
-                <a:srgbClr val="FF0000"/>
+                <a:srgbClr val="002060"/>
               </a:solidFill>
             </a:endParaRPr>
           </a:p>
@@ -32423,14 +32897,14 @@
             <a:r>
               <a:rPr lang="en-US" sz="1600" dirty="0">
                 <a:solidFill>
-                  <a:srgbClr val="FF0000"/>
+                  <a:srgbClr val="002060"/>
                 </a:solidFill>
               </a:rPr>
               <a:t>6. Sadiq M., Jain S. K. A fuzzy based approach for the selection of goals in goal oriented requirements elicitation process //International Journal of System Assurance Engineering and Management, 2015, 6 (2), P. 157-164.</a:t>
             </a:r>
             <a:endParaRPr lang="ru-RU" sz="1600" dirty="0">
               <a:solidFill>
-                <a:srgbClr val="FF0000"/>
+                <a:srgbClr val="002060"/>
               </a:solidFill>
             </a:endParaRPr>
           </a:p>
@@ -32446,22 +32920,14 @@
             <a:r>
               <a:rPr lang="en-US" sz="1600" dirty="0">
                 <a:solidFill>
-                  <a:srgbClr val="FF0000"/>
-                </a:solidFill>
-              </a:rPr>
-              <a:t>7. </a:t>
-            </a:r>
-            <a:r>
-              <a:rPr lang="en-US" sz="1600" b="1" dirty="0">
-                <a:solidFill>
-                  <a:srgbClr val="FF0000"/>
-                </a:solidFill>
-              </a:rPr>
-              <a:t>Gondal A. N., Kausar M., Mazhar N., Amjad M. Prioritization of Agile Requirement Elicitation Techniques Using Fuzzy Logic //International Journal of Fuzzy Systems, 2025, P. 1-21.</a:t>
+                  <a:srgbClr val="002060"/>
+                </a:solidFill>
+              </a:rPr>
+              <a:t>7. Gondal A. N., Kausar M., Mazhar N., Amjad M. Prioritization of Agile Requirement Elicitation Techniques Using Fuzzy Logic //International Journal of Fuzzy Systems, 2025, P. 1-21.</a:t>
             </a:r>
             <a:endParaRPr lang="ru-RU" sz="1600" dirty="0">
               <a:solidFill>
-                <a:srgbClr val="FF0000"/>
+                <a:srgbClr val="002060"/>
               </a:solidFill>
             </a:endParaRPr>
           </a:p>
@@ -32477,22 +32943,27 @@
             <a:r>
               <a:rPr lang="en-US" sz="1600" dirty="0">
                 <a:solidFill>
-                  <a:srgbClr val="FF0000"/>
+                  <a:srgbClr val="002060"/>
                 </a:solidFill>
               </a:rPr>
               <a:t>8. Zamudio L., Aguilar J. A., Tripp C., Misra S. A requirements engineering techniques review in agile software development methods // In International Conference on Computational Science and Its Applications. Springer, Cham, 2017, PP. 683-698</a:t>
             </a:r>
             <a:endParaRPr lang="ru-RU" sz="1600" dirty="0">
               <a:solidFill>
-                <a:srgbClr val="FF0000"/>
+                <a:srgbClr val="002060"/>
               </a:solidFill>
             </a:endParaRPr>
           </a:p>
           <a:p>
+            <a:pPr>
+              <a:spcAft>
+                <a:spcPts val="600"/>
+              </a:spcAft>
+            </a:pPr>
             <a:r>
               <a:rPr lang="en-US" sz="1600" dirty="0">
                 <a:solidFill>
-                  <a:srgbClr val="FF0000"/>
+                  <a:srgbClr val="002060"/>
                 </a:solidFill>
               </a:rPr>
               <a:t>9. Alflen N. C., Prado E. P. V. Requirements elicitation techniques for software development: a systematic review of literature // </a:t>
@@ -32500,7 +32971,7 @@
             <a:r>
               <a:rPr lang="en-US" sz="1600" dirty="0" err="1">
                 <a:solidFill>
-                  <a:srgbClr val="FF0000"/>
+                  <a:srgbClr val="002060"/>
                 </a:solidFill>
               </a:rPr>
               <a:t>AtoZ</a:t>
@@ -32508,7 +32979,7 @@
             <a:r>
               <a:rPr lang="en-US" sz="1600" dirty="0">
                 <a:solidFill>
-                  <a:srgbClr val="FF0000"/>
+                  <a:srgbClr val="002060"/>
                 </a:solidFill>
               </a:rPr>
               <a:t>: </a:t>
@@ -32516,7 +32987,7 @@
             <a:r>
               <a:rPr lang="en-US" sz="1600" dirty="0" err="1">
                 <a:solidFill>
-                  <a:srgbClr val="FF0000"/>
+                  <a:srgbClr val="002060"/>
                 </a:solidFill>
               </a:rPr>
               <a:t>novas</a:t>
@@ -32524,7 +32995,7 @@
             <a:r>
               <a:rPr lang="en-US" sz="1600" dirty="0">
                 <a:solidFill>
-                  <a:srgbClr val="FF0000"/>
+                  <a:srgbClr val="002060"/>
                 </a:solidFill>
               </a:rPr>
               <a:t> </a:t>
@@ -32532,7 +33003,7 @@
             <a:r>
               <a:rPr lang="en-US" sz="1600" dirty="0" err="1">
                 <a:solidFill>
-                  <a:srgbClr val="FF0000"/>
+                  <a:srgbClr val="002060"/>
                 </a:solidFill>
               </a:rPr>
               <a:t>práticas</a:t>
@@ -32540,7 +33011,7 @@
             <a:r>
               <a:rPr lang="en-US" sz="1600" dirty="0">
                 <a:solidFill>
-                  <a:srgbClr val="FF0000"/>
+                  <a:srgbClr val="002060"/>
                 </a:solidFill>
               </a:rPr>
               <a:t> </a:t>
@@ -32548,7 +33019,7 @@
             <a:r>
               <a:rPr lang="en-US" sz="1600" dirty="0" err="1">
                 <a:solidFill>
-                  <a:srgbClr val="FF0000"/>
+                  <a:srgbClr val="002060"/>
                 </a:solidFill>
               </a:rPr>
               <a:t>em</a:t>
@@ -32556,7 +33027,7 @@
             <a:r>
               <a:rPr lang="en-US" sz="1600" dirty="0">
                 <a:solidFill>
-                  <a:srgbClr val="FF0000"/>
+                  <a:srgbClr val="002060"/>
                 </a:solidFill>
               </a:rPr>
               <a:t> </a:t>
@@ -32564,7 +33035,7 @@
             <a:r>
               <a:rPr lang="en-US" sz="1600" dirty="0" err="1">
                 <a:solidFill>
-                  <a:srgbClr val="FF0000"/>
+                  <a:srgbClr val="002060"/>
                 </a:solidFill>
               </a:rPr>
               <a:t>informação</a:t>
@@ -32572,7 +33043,7 @@
             <a:r>
               <a:rPr lang="en-US" sz="1600" dirty="0">
                 <a:solidFill>
-                  <a:srgbClr val="FF0000"/>
+                  <a:srgbClr val="002060"/>
                 </a:solidFill>
               </a:rPr>
               <a:t> e </a:t>
@@ -32580,7 +33051,7 @@
             <a:r>
               <a:rPr lang="en-US" sz="1600" dirty="0" err="1">
                 <a:solidFill>
-                  <a:srgbClr val="FF0000"/>
+                  <a:srgbClr val="002060"/>
                 </a:solidFill>
               </a:rPr>
               <a:t>conhecimento</a:t>
@@ -32588,7 +33059,7 @@
             <a:r>
               <a:rPr lang="en-US" sz="1600" dirty="0">
                 <a:solidFill>
-                  <a:srgbClr val="FF0000"/>
+                  <a:srgbClr val="002060"/>
                 </a:solidFill>
               </a:rPr>
               <a:t>. 2021. </a:t>
@@ -32596,7 +33067,7 @@
             <a:r>
               <a:rPr lang="ru-RU" sz="1600" dirty="0">
                 <a:solidFill>
-                  <a:srgbClr val="FF0000"/>
+                  <a:srgbClr val="002060"/>
                 </a:solidFill>
               </a:rPr>
               <a:t>Т</a:t>
@@ -32604,7 +33075,7 @@
             <a:r>
               <a:rPr lang="en-US" sz="1600" dirty="0">
                 <a:solidFill>
-                  <a:srgbClr val="FF0000"/>
+                  <a:srgbClr val="002060"/>
                 </a:solidFill>
               </a:rPr>
               <a:t>. 10. №. 1. PP. 118-128</a:t>
@@ -32612,14 +33083,14 @@
             <a:r>
               <a:rPr lang="en-US" dirty="0">
                 <a:solidFill>
-                  <a:srgbClr val="FF0000"/>
+                  <a:srgbClr val="002060"/>
                 </a:solidFill>
               </a:rPr>
               <a:t>.</a:t>
             </a:r>
             <a:endParaRPr lang="ru-RU" dirty="0">
               <a:solidFill>
-                <a:srgbClr val="FF0000"/>
+                <a:srgbClr val="002060"/>
               </a:solidFill>
             </a:endParaRPr>
           </a:p>
@@ -32963,7 +33434,7 @@
             <a:r>
               <a:rPr lang="en-US" sz="1500" dirty="0">
                 <a:solidFill>
-                  <a:srgbClr val="FF0000"/>
+                  <a:srgbClr val="002060"/>
                 </a:solidFill>
               </a:rPr>
               <a:t>10. Asghar, A.R., Tabassum, A., Bhatti, S.N. and Jadi, A.M. Impact and challenges of requirements elicitation &amp; prioritization in quality to agile process: Scrum as a case scenario //2017 International Conference on Communication Technologies (</a:t>
@@ -32971,7 +33442,7 @@
             <a:r>
               <a:rPr lang="en-US" sz="1500" dirty="0" err="1">
                 <a:solidFill>
-                  <a:srgbClr val="FF0000"/>
+                  <a:srgbClr val="002060"/>
                 </a:solidFill>
               </a:rPr>
               <a:t>ComTech</a:t>
@@ -32979,14 +33450,14 @@
             <a:r>
               <a:rPr lang="en-US" sz="1500" dirty="0">
                 <a:solidFill>
-                  <a:srgbClr val="FF0000"/>
+                  <a:srgbClr val="002060"/>
                 </a:solidFill>
               </a:rPr>
               <a:t>). IEEE, 2017. PP. 50-55.</a:t>
             </a:r>
             <a:endParaRPr lang="ru-RU" sz="1500" dirty="0">
               <a:solidFill>
-                <a:srgbClr val="FF0000"/>
+                <a:srgbClr val="002060"/>
               </a:solidFill>
             </a:endParaRPr>
           </a:p>
@@ -32999,7 +33470,7 @@
             <a:r>
               <a:rPr lang="en-US" sz="1500" dirty="0">
                 <a:solidFill>
-                  <a:srgbClr val="FF0000"/>
+                  <a:srgbClr val="002060"/>
                 </a:solidFill>
               </a:rPr>
               <a:t>11. </a:t>
@@ -33007,7 +33478,7 @@
             <a:r>
               <a:rPr lang="en-US" sz="1500" dirty="0" err="1">
                 <a:solidFill>
-                  <a:srgbClr val="FF0000"/>
+                  <a:srgbClr val="002060"/>
                 </a:solidFill>
               </a:rPr>
               <a:t>Egesoy</a:t>
@@ -33015,14 +33486,14 @@
             <a:r>
               <a:rPr lang="en-US" sz="1500" dirty="0">
                 <a:solidFill>
-                  <a:srgbClr val="FF0000"/>
+                  <a:srgbClr val="002060"/>
                 </a:solidFill>
               </a:rPr>
               <a:t> A, Güzel A. Fuzzy Logic Support for Requirements Engineering // International Journal of Innovative Research in Computer Science &amp; Technology (IJIRCST) ISSN. 2021:2347-5552.</a:t>
             </a:r>
             <a:endParaRPr lang="ru-RU" sz="1500" dirty="0">
               <a:solidFill>
-                <a:srgbClr val="FF0000"/>
+                <a:srgbClr val="002060"/>
               </a:solidFill>
             </a:endParaRPr>
           </a:p>
@@ -33035,7 +33506,7 @@
             <a:r>
               <a:rPr lang="en-US" sz="1500" dirty="0">
                 <a:solidFill>
-                  <a:srgbClr val="FF0000"/>
+                  <a:srgbClr val="002060"/>
                 </a:solidFill>
               </a:rPr>
               <a:t>12. Dongmo C. A Review of Non-Functional Requirements Analysis Throughout the SDLC //Computers.  2024.  </a:t>
@@ -33043,7 +33514,7 @@
             <a:r>
               <a:rPr lang="ru-RU" sz="1500" dirty="0">
                 <a:solidFill>
-                  <a:srgbClr val="FF0000"/>
+                  <a:srgbClr val="002060"/>
                 </a:solidFill>
               </a:rPr>
               <a:t>Т</a:t>
@@ -33051,7 +33522,7 @@
             <a:r>
               <a:rPr lang="en-US" sz="1500" dirty="0">
                 <a:solidFill>
-                  <a:srgbClr val="FF0000"/>
+                  <a:srgbClr val="002060"/>
                 </a:solidFill>
               </a:rPr>
               <a:t>. 13.  №. 12.  </a:t>
@@ -33059,7 +33530,7 @@
             <a:r>
               <a:rPr lang="ru-RU" sz="1500" dirty="0">
                 <a:solidFill>
-                  <a:srgbClr val="FF0000"/>
+                  <a:srgbClr val="002060"/>
                 </a:solidFill>
               </a:rPr>
               <a:t>С</a:t>
@@ -33067,14 +33538,14 @@
             <a:r>
               <a:rPr lang="en-US" sz="1500" dirty="0">
                 <a:solidFill>
-                  <a:srgbClr val="FF0000"/>
+                  <a:srgbClr val="002060"/>
                 </a:solidFill>
               </a:rPr>
               <a:t>. 308.</a:t>
             </a:r>
             <a:endParaRPr lang="ru-RU" sz="1500" dirty="0">
               <a:solidFill>
-                <a:srgbClr val="FF0000"/>
+                <a:srgbClr val="002060"/>
               </a:solidFill>
             </a:endParaRPr>
           </a:p>
@@ -33087,7 +33558,7 @@
             <a:r>
               <a:rPr lang="en-US" sz="1500" dirty="0">
                 <a:solidFill>
-                  <a:srgbClr val="FF0000"/>
+                  <a:srgbClr val="002060"/>
                 </a:solidFill>
               </a:rPr>
               <a:t>13. El Beggar O. IFEJM: new intuitionistic fuzzy expert judgment method for effort estimation in agile software development //Arabian Journal for Science and Engineering. 2024. </a:t>
@@ -33095,7 +33566,7 @@
             <a:r>
               <a:rPr lang="ru-RU" sz="1500" dirty="0">
                 <a:solidFill>
-                  <a:srgbClr val="FF0000"/>
+                  <a:srgbClr val="002060"/>
                 </a:solidFill>
               </a:rPr>
               <a:t>Т</a:t>
@@ -33103,14 +33574,14 @@
             <a:r>
               <a:rPr lang="en-US" sz="1500" dirty="0">
                 <a:solidFill>
-                  <a:srgbClr val="FF0000"/>
+                  <a:srgbClr val="002060"/>
                 </a:solidFill>
               </a:rPr>
               <a:t>. 49. №. 3. P. 2887-2908.</a:t>
             </a:r>
             <a:endParaRPr lang="ru-RU" sz="1500" dirty="0">
               <a:solidFill>
-                <a:srgbClr val="FF0000"/>
+                <a:srgbClr val="002060"/>
               </a:solidFill>
             </a:endParaRPr>
           </a:p>
@@ -33123,7 +33594,7 @@
             <a:r>
               <a:rPr lang="en-US" sz="1500" dirty="0">
                 <a:solidFill>
-                  <a:srgbClr val="FF0000"/>
+                  <a:srgbClr val="002060"/>
                 </a:solidFill>
               </a:rPr>
               <a:t>14. Gul M., Alam K. A. Identifying contemporary challenges pertaining to Distributed Software Development using Fuzzy Delphi Method. 2023. PP. 1-23 researchgate.com (</a:t>
@@ -33131,7 +33602,7 @@
             <a:r>
               <a:rPr lang="ru-RU" sz="1500" dirty="0">
                 <a:solidFill>
-                  <a:srgbClr val="FF0000"/>
+                  <a:srgbClr val="002060"/>
                 </a:solidFill>
               </a:rPr>
               <a:t>препринт</a:t>
@@ -33139,14 +33610,14 @@
             <a:r>
               <a:rPr lang="en-US" sz="1500" dirty="0">
                 <a:solidFill>
-                  <a:srgbClr val="FF0000"/>
+                  <a:srgbClr val="002060"/>
                 </a:solidFill>
               </a:rPr>
               <a:t>)</a:t>
             </a:r>
             <a:endParaRPr lang="ru-RU" sz="1500" dirty="0">
               <a:solidFill>
-                <a:srgbClr val="FF0000"/>
+                <a:srgbClr val="002060"/>
               </a:solidFill>
             </a:endParaRPr>
           </a:p>
@@ -33159,7 +33630,7 @@
             <a:r>
               <a:rPr lang="en-US" sz="1500" dirty="0">
                 <a:solidFill>
-                  <a:srgbClr val="FF0000"/>
+                  <a:srgbClr val="002060"/>
                 </a:solidFill>
               </a:rPr>
               <a:t>15. Kumar A., Nadeem M., Shameem M. Multicriteria decision‐making–based framework for implementing DevOps practices: A fuzzy best–worst approach //Journal of Software: Evolution and Process. 2024. </a:t>
@@ -33167,7 +33638,7 @@
             <a:r>
               <a:rPr lang="ru-RU" sz="1500" dirty="0">
                 <a:solidFill>
-                  <a:srgbClr val="FF0000"/>
+                  <a:srgbClr val="002060"/>
                 </a:solidFill>
               </a:rPr>
               <a:t>Т</a:t>
@@ -33175,14 +33646,14 @@
             <a:r>
               <a:rPr lang="en-US" sz="1500" dirty="0">
                 <a:solidFill>
-                  <a:srgbClr val="FF0000"/>
+                  <a:srgbClr val="002060"/>
                 </a:solidFill>
               </a:rPr>
               <a:t>. 36. №. 6. PP.1-31.</a:t>
             </a:r>
             <a:endParaRPr lang="ru-RU" sz="1500" dirty="0">
               <a:solidFill>
-                <a:srgbClr val="FF0000"/>
+                <a:srgbClr val="002060"/>
               </a:solidFill>
             </a:endParaRPr>
           </a:p>
@@ -33195,7 +33666,7 @@
             <a:r>
               <a:rPr lang="en-US" sz="1500" dirty="0">
                 <a:solidFill>
-                  <a:srgbClr val="FF0000"/>
+                  <a:srgbClr val="002060"/>
                 </a:solidFill>
               </a:rPr>
               <a:t>16. </a:t>
@@ -33203,7 +33674,7 @@
             <a:r>
               <a:rPr lang="en-US" sz="1500" dirty="0" err="1">
                 <a:solidFill>
-                  <a:srgbClr val="FF0000"/>
+                  <a:srgbClr val="002060"/>
                 </a:solidFill>
               </a:rPr>
               <a:t>Semenkovich</a:t>
@@ -33211,7 +33682,7 @@
             <a:r>
               <a:rPr lang="en-US" sz="1500" dirty="0">
                 <a:solidFill>
-                  <a:srgbClr val="FF0000"/>
+                  <a:srgbClr val="002060"/>
                 </a:solidFill>
               </a:rPr>
               <a:t>, S. A. A Modified Scrum Story Points Estimation Method Based on Fuzzy Logic Approach / S. A. </a:t>
@@ -33219,7 +33690,7 @@
             <a:r>
               <a:rPr lang="en-US" sz="1500" dirty="0" err="1">
                 <a:solidFill>
-                  <a:srgbClr val="FF0000"/>
+                  <a:srgbClr val="002060"/>
                 </a:solidFill>
               </a:rPr>
               <a:t>Semenkovich</a:t>
@@ -33227,7 +33698,7 @@
             <a:r>
               <a:rPr lang="en-US" sz="1500" dirty="0">
                 <a:solidFill>
-                  <a:srgbClr val="FF0000"/>
+                  <a:srgbClr val="002060"/>
                 </a:solidFill>
               </a:rPr>
               <a:t>, O. I. </a:t>
@@ -33235,7 +33706,7 @@
             <a:r>
               <a:rPr lang="en-US" sz="1500" dirty="0" err="1">
                 <a:solidFill>
-                  <a:srgbClr val="FF0000"/>
+                  <a:srgbClr val="002060"/>
                 </a:solidFill>
               </a:rPr>
               <a:t>Kolekonova</a:t>
@@ -33243,7 +33714,7 @@
             <a:r>
               <a:rPr lang="en-US" sz="1500" dirty="0">
                 <a:solidFill>
-                  <a:srgbClr val="FF0000"/>
+                  <a:srgbClr val="002060"/>
                 </a:solidFill>
               </a:rPr>
               <a:t>, K. Y. </a:t>
@@ -33251,7 +33722,7 @@
             <a:r>
               <a:rPr lang="en-US" sz="1500" dirty="0" err="1">
                 <a:solidFill>
-                  <a:srgbClr val="FF0000"/>
+                  <a:srgbClr val="002060"/>
                 </a:solidFill>
               </a:rPr>
               <a:t>Degtiarev</a:t>
@@ -33259,14 +33730,14 @@
             <a:r>
               <a:rPr lang="en-US" sz="1500" dirty="0">
                 <a:solidFill>
-                  <a:srgbClr val="FF0000"/>
+                  <a:srgbClr val="002060"/>
                 </a:solidFill>
               </a:rPr>
               <a:t> // Proceedings of the Institute for System Programming of the RAS. 2017. Vol. 29, No. 5. P. 19-38. – DOI 10.15514/ISPRAS-2017-29(5)-2. – EDN ZWZZRF.</a:t>
             </a:r>
             <a:endParaRPr lang="ru-RU" sz="1500" dirty="0">
               <a:solidFill>
-                <a:srgbClr val="FF0000"/>
+                <a:srgbClr val="002060"/>
               </a:solidFill>
             </a:endParaRPr>
           </a:p>
@@ -33607,7 +34078,7 @@
             <a:r>
               <a:rPr lang="en-US" sz="1500" dirty="0">
                 <a:solidFill>
-                  <a:srgbClr val="FF0000"/>
+                  <a:srgbClr val="002060"/>
                 </a:solidFill>
               </a:rPr>
               <a:t>17. International </a:t>
@@ -33615,7 +34086,7 @@
             <a:r>
               <a:rPr lang="en-US" sz="1500" dirty="0" err="1">
                 <a:solidFill>
-                  <a:srgbClr val="FF0000"/>
+                  <a:srgbClr val="002060"/>
                 </a:solidFill>
               </a:rPr>
               <a:t>Standart</a:t>
@@ -33623,14 +34094,14 @@
             <a:r>
               <a:rPr lang="en-US" sz="1500" dirty="0">
                 <a:solidFill>
-                  <a:srgbClr val="FF0000"/>
+                  <a:srgbClr val="002060"/>
                 </a:solidFill>
               </a:rPr>
               <a:t> ISO/IEC/IEEE 29148 (second edition 2018-11) Systems and software engineering - Life cycle processes – Requirements engineering</a:t>
             </a:r>
             <a:endParaRPr lang="ru-RU" sz="1500" dirty="0">
               <a:solidFill>
-                <a:srgbClr val="FF0000"/>
+                <a:srgbClr val="002060"/>
               </a:solidFill>
             </a:endParaRPr>
           </a:p>
@@ -33643,7 +34114,7 @@
             <a:r>
               <a:rPr lang="en-US" sz="1500" dirty="0">
                 <a:solidFill>
-                  <a:srgbClr val="FF0000"/>
+                  <a:srgbClr val="002060"/>
                 </a:solidFill>
               </a:rPr>
               <a:t>18. International </a:t>
@@ -33651,7 +34122,7 @@
             <a:r>
               <a:rPr lang="en-US" sz="1500" dirty="0" err="1">
                 <a:solidFill>
-                  <a:srgbClr val="FF0000"/>
+                  <a:srgbClr val="002060"/>
                 </a:solidFill>
               </a:rPr>
               <a:t>Standart</a:t>
@@ -33659,14 +34130,14 @@
             <a:r>
               <a:rPr lang="en-US" sz="1500" dirty="0">
                 <a:solidFill>
-                  <a:srgbClr val="FF0000"/>
+                  <a:srgbClr val="002060"/>
                 </a:solidFill>
               </a:rPr>
               <a:t> ISO/IEC/IEEE 26515 (second edition 2018-12) Systems and software engineering - Developing information for users in an agile environment</a:t>
             </a:r>
             <a:endParaRPr lang="ru-RU" sz="1500" dirty="0">
               <a:solidFill>
-                <a:srgbClr val="FF0000"/>
+                <a:srgbClr val="002060"/>
               </a:solidFill>
             </a:endParaRPr>
           </a:p>
@@ -33679,14 +34150,14 @@
             <a:r>
               <a:rPr lang="en-US" sz="1500" dirty="0">
                 <a:solidFill>
-                  <a:srgbClr val="FF0000"/>
+                  <a:srgbClr val="002060"/>
                 </a:solidFill>
               </a:rPr>
               <a:t>19. Zadeh L.A. Fuzzy sets // Information and Control. 1965. Vol. 8. P. 338–353.</a:t>
             </a:r>
             <a:endParaRPr lang="ru-RU" sz="1500" dirty="0">
               <a:solidFill>
-                <a:srgbClr val="FF0000"/>
+                <a:srgbClr val="002060"/>
               </a:solidFill>
             </a:endParaRPr>
           </a:p>
@@ -33699,7 +34170,7 @@
             <a:r>
               <a:rPr lang="en-US" sz="1500" dirty="0">
                 <a:solidFill>
-                  <a:srgbClr val="FF0000"/>
+                  <a:srgbClr val="002060"/>
                 </a:solidFill>
               </a:rPr>
               <a:t>20. </a:t>
@@ -33707,7 +34178,7 @@
             <a:r>
               <a:rPr lang="en-US" sz="1500" dirty="0" err="1">
                 <a:solidFill>
-                  <a:srgbClr val="FF0000"/>
+                  <a:srgbClr val="002060"/>
                 </a:solidFill>
               </a:rPr>
               <a:t>Klir</a:t>
@@ -33715,14 +34186,14 @@
             <a:r>
               <a:rPr lang="en-US" sz="1500" dirty="0">
                 <a:solidFill>
-                  <a:srgbClr val="FF0000"/>
+                  <a:srgbClr val="002060"/>
                 </a:solidFill>
               </a:rPr>
               <a:t> George J. Fuzzy logic. Unearthing its meaning and significance // IEEE Potentials/ October/November 1995. P.10-15</a:t>
             </a:r>
             <a:endParaRPr lang="ru-RU" sz="1500" dirty="0">
               <a:solidFill>
-                <a:srgbClr val="FF0000"/>
+                <a:srgbClr val="002060"/>
               </a:solidFill>
             </a:endParaRPr>
           </a:p>
@@ -33735,14 +34206,14 @@
             <a:r>
               <a:rPr lang="en-US" sz="1500" dirty="0">
                 <a:solidFill>
-                  <a:srgbClr val="FF0000"/>
+                  <a:srgbClr val="002060"/>
                 </a:solidFill>
               </a:rPr>
               <a:t>21. Mendel J.M., John R.I. and Liu F. Interval Type-2 Fuzzy Logic Systems Made Simple // IEEE TRANSACTIONS ON FUZZY SYSTEMS, 14(6), 2006. P.808-821.</a:t>
             </a:r>
             <a:endParaRPr lang="ru-RU" sz="1500" dirty="0">
               <a:solidFill>
-                <a:srgbClr val="FF0000"/>
+                <a:srgbClr val="002060"/>
               </a:solidFill>
             </a:endParaRPr>
           </a:p>
@@ -33755,14 +34226,14 @@
             <a:r>
               <a:rPr lang="en-US" sz="1500" dirty="0">
                 <a:solidFill>
-                  <a:srgbClr val="FF0000"/>
+                  <a:srgbClr val="002060"/>
                 </a:solidFill>
               </a:rPr>
               <a:t>22. Mendel J.M. Type-2 Fuzzy Sets and Systems: An Overview // IEEE Computational Intelligence Magazine, 2(1), 2007. P. 20-29.</a:t>
             </a:r>
             <a:endParaRPr lang="ru-RU" sz="1500" dirty="0">
               <a:solidFill>
-                <a:srgbClr val="FF0000"/>
+                <a:srgbClr val="002060"/>
               </a:solidFill>
             </a:endParaRPr>
           </a:p>
@@ -33775,7 +34246,7 @@
             <a:r>
               <a:rPr lang="en-US" sz="1500" dirty="0">
                 <a:solidFill>
-                  <a:srgbClr val="FF0000"/>
+                  <a:srgbClr val="002060"/>
                 </a:solidFill>
               </a:rPr>
               <a:t>23. Mendel J.M. Type-2 Fuzzy Sets as Well as Computing with Words // IEEE Computational Intelligence Magazine, 14(1), 2019. P</a:t>
@@ -33783,7 +34254,7 @@
             <a:r>
               <a:rPr lang="ru-RU" sz="1500" dirty="0">
                 <a:solidFill>
-                  <a:srgbClr val="FF0000"/>
+                  <a:srgbClr val="002060"/>
                 </a:solidFill>
               </a:rPr>
               <a:t>. 82-95.</a:t>
@@ -33798,7 +34269,7 @@
             <a:r>
               <a:rPr lang="ru-RU" sz="1500" dirty="0">
                 <a:solidFill>
-                  <a:srgbClr val="FF0000"/>
+                  <a:srgbClr val="002060"/>
                 </a:solidFill>
               </a:rPr>
               <a:t>24. Понаровская И.С. Методы оценки затрат на разработку ПО с использованием аппарата нечетких множеств // курсовой проект, 2025, 96 с. – </a:t>
@@ -33806,7 +34277,7 @@
             <a:r>
               <a:rPr lang="ru-RU" sz="1500" u="sng" dirty="0">
                 <a:solidFill>
-                  <a:srgbClr val="0563C1"/>
+                  <a:srgbClr val="002060"/>
                 </a:solidFill>
                 <a:hlinkClick r:id="rId3">
                   <a:extLst>
@@ -33816,26 +34287,11 @@
                   </a:extLst>
                 </a:hlinkClick>
               </a:rPr>
-              <a:t>https</a:t>
-            </a:r>
-            <a:r>
-              <a:rPr lang="ru-RU" sz="1500" u="sng" dirty="0">
-                <a:solidFill>
-                  <a:srgbClr val="FF0000"/>
-                </a:solidFill>
-                <a:hlinkClick r:id="rId3">
-                  <a:extLst>
-                    <a:ext uri="{A12FA001-AC4F-418D-AE19-62706E023703}">
-                      <ahyp:hlinkClr xmlns:ahyp="http://schemas.microsoft.com/office/drawing/2018/hyperlinkcolor" val="tx"/>
-                    </a:ext>
-                  </a:extLst>
-                </a:hlinkClick>
-              </a:rPr>
-              <a:t>://drive.google.com/file/d/1d8sveBeF56fo5aUc0ToMKTChP4s1HwBn/view?usp=drive_link</a:t>
+              <a:t>https://drive.google.com/file/d/1d8sveBeF56fo5aUc0ToMKTChP4s1HwBn/view?usp=drive_link</a:t>
             </a:r>
             <a:endParaRPr lang="ru-RU" sz="1500" dirty="0">
               <a:solidFill>
-                <a:srgbClr val="FF0000"/>
+                <a:srgbClr val="002060"/>
               </a:solidFill>
             </a:endParaRPr>
           </a:p>
@@ -33846,56 +34302,6 @@
               </a:spcAft>
             </a:pPr>
             <a:endParaRPr lang="ru-RU" sz="800" dirty="0">
-              <a:solidFill>
-                <a:srgbClr val="FF0000"/>
-              </a:solidFill>
-            </a:endParaRPr>
-          </a:p>
-          <a:p>
-            <a:pPr>
-              <a:spcAft>
-                <a:spcPts val="600"/>
-              </a:spcAft>
-            </a:pPr>
-            <a:r>
-              <a:rPr lang="ru-RU" sz="1500" dirty="0">
-                <a:solidFill>
-                  <a:srgbClr val="FF0000"/>
-                </a:solidFill>
-              </a:rPr>
-              <a:t>Указанные выше статьи (1 -16) проанализированы с точки зрения общих источников. С результатом анализа можно ознакомиться по ссылке –</a:t>
-            </a:r>
-            <a:r>
-              <a:rPr lang="en-US" sz="1500" u="sng" dirty="0">
-                <a:solidFill>
-                  <a:srgbClr val="0563C1"/>
-                </a:solidFill>
-                <a:hlinkClick r:id="rId4">
-                  <a:extLst>
-                    <a:ext uri="{A12FA001-AC4F-418D-AE19-62706E023703}">
-                      <ahyp:hlinkClr xmlns:ahyp="http://schemas.microsoft.com/office/drawing/2018/hyperlinkcolor" val="tx"/>
-                    </a:ext>
-                  </a:extLst>
-                </a:hlinkClick>
-              </a:rPr>
-              <a:t>https</a:t>
-            </a:r>
-            <a:r>
-              <a:rPr lang="en-US" sz="1500" u="sng" dirty="0">
-                <a:solidFill>
-                  <a:srgbClr val="FF0000"/>
-                </a:solidFill>
-                <a:hlinkClick r:id="rId4">
-                  <a:extLst>
-                    <a:ext uri="{A12FA001-AC4F-418D-AE19-62706E023703}">
-                      <ahyp:hlinkClr xmlns:ahyp="http://schemas.microsoft.com/office/drawing/2018/hyperlinkcolor" val="tx"/>
-                    </a:ext>
-                  </a:extLst>
-                </a:hlinkClick>
-              </a:rPr>
-              <a:t>://docs.google.com/spreadsheets/d/19LgAIZoDm3VNZLRM6TtRB7lNih_42OYG/edit?usp=drive_link&amp;ouid=111580538807072465554&amp;rtpof=true&amp;sd=true</a:t>
-            </a:r>
-            <a:endParaRPr lang="ru-RU" sz="1500" dirty="0">
               <a:solidFill>
                 <a:srgbClr val="FF0000"/>
               </a:solidFill>
@@ -34755,101 +35161,132 @@
           </a:bodyPr>
           <a:lstStyle/>
           <a:p>
-            <a:pPr marL="74772">
-              <a:lnSpc>
-                <a:spcPct val="105000"/>
-              </a:lnSpc>
-              <a:buClr>
-                <a:srgbClr val="1F3864"/>
-              </a:buClr>
-              <a:buSzPct val="100000"/>
+            <a:pPr>
+              <a:spcBef>
+                <a:spcPts val="600"/>
+              </a:spcBef>
             </a:pPr>
             <a:r>
+              <a:rPr lang="ru-RU" sz="2400" dirty="0">
+                <a:solidFill>
+                  <a:srgbClr val="002060"/>
+                </a:solidFill>
+              </a:rPr>
+              <a:t>В процессах разработки программного обеспечения, где также имеет место коллективная работа, вопрос </a:t>
+            </a:r>
+            <a:r>
               <a:rPr lang="ru-RU" sz="2400" b="1" dirty="0">
                 <a:solidFill>
-                  <a:srgbClr val="FF0000"/>
-                </a:solidFill>
-              </a:rPr>
-              <a:t>Актуальность</a:t>
+                  <a:srgbClr val="002060"/>
+                </a:solidFill>
+              </a:rPr>
+              <a:t>качественного формирования информационного поля</a:t>
             </a:r>
             <a:r>
               <a:rPr lang="ru-RU" sz="2400" dirty="0">
                 <a:solidFill>
-                  <a:srgbClr val="FF0000"/>
-                </a:solidFill>
-              </a:rPr>
-              <a:t> (</a:t>
-            </a:r>
-            <a:r>
-              <a:rPr lang="en-US" sz="2400" dirty="0">
-                <a:solidFill>
-                  <a:srgbClr val="FF0000"/>
-                </a:solidFill>
-              </a:rPr>
-              <a:t>gap to knowledge</a:t>
+                  <a:srgbClr val="002060"/>
+                </a:solidFill>
+              </a:rPr>
+              <a:t> имеет прямое влияние на результат деятельности, поскольку </a:t>
+            </a:r>
+            <a:r>
+              <a:rPr lang="ru-RU" sz="2400" b="1" dirty="0">
+                <a:solidFill>
+                  <a:srgbClr val="002060"/>
+                </a:solidFill>
+              </a:rPr>
+              <a:t>некорректное восприятие информации </a:t>
             </a:r>
             <a:r>
               <a:rPr lang="ru-RU" sz="2400" dirty="0">
                 <a:solidFill>
-                  <a:srgbClr val="FF0000"/>
-                </a:solidFill>
-              </a:rPr>
-              <a:t>) – вопрос еще не решен…</a:t>
-            </a:r>
-          </a:p>
-          <a:p>
-            <a:pPr marL="74772">
-              <a:lnSpc>
-                <a:spcPct val="105000"/>
-              </a:lnSpc>
-              <a:buClr>
-                <a:srgbClr val="1F3864"/>
-              </a:buClr>
-              <a:buSzPct val="100000"/>
+                  <a:srgbClr val="002060"/>
+                </a:solidFill>
+              </a:rPr>
+              <a:t>или </a:t>
+            </a:r>
+            <a:r>
+              <a:rPr lang="ru-RU" sz="2400" b="1" dirty="0">
+                <a:solidFill>
+                  <a:srgbClr val="002060"/>
+                </a:solidFill>
+              </a:rPr>
+              <a:t>неполнота сведений </a:t>
+            </a:r>
+            <a:r>
+              <a:rPr lang="ru-RU" sz="2400" dirty="0">
+                <a:solidFill>
+                  <a:srgbClr val="002060"/>
+                </a:solidFill>
+              </a:rPr>
+              <a:t>приводят к принятию </a:t>
+            </a:r>
+            <a:r>
+              <a:rPr lang="ru-RU" sz="2400" b="1" dirty="0">
+                <a:solidFill>
+                  <a:srgbClr val="002060"/>
+                </a:solidFill>
+              </a:rPr>
+              <a:t>ошибочных решений</a:t>
+            </a:r>
+            <a:r>
+              <a:rPr lang="ru-RU" sz="2400" dirty="0">
+                <a:solidFill>
+                  <a:srgbClr val="002060"/>
+                </a:solidFill>
+              </a:rPr>
+              <a:t>, срывам сроков и удорожаниям проектов. </a:t>
+            </a:r>
+            <a:endParaRPr lang="en-US" sz="2400" dirty="0">
+              <a:solidFill>
+                <a:srgbClr val="002060"/>
+              </a:solidFill>
+            </a:endParaRPr>
+          </a:p>
+          <a:p>
+            <a:pPr>
+              <a:spcBef>
+                <a:spcPts val="600"/>
+              </a:spcBef>
             </a:pPr>
             <a:r>
-              <a:rPr lang="ru-RU" sz="2400" b="1" dirty="0">
-                <a:solidFill>
-                  <a:srgbClr val="FF0000"/>
-                </a:solidFill>
-              </a:rPr>
-              <a:t>Новизна</a:t>
-            </a:r>
-            <a:r>
-              <a:rPr lang="ru-RU" sz="2400" dirty="0">
-                <a:solidFill>
-                  <a:srgbClr val="FF0000"/>
-                </a:solidFill>
-              </a:rPr>
-              <a:t> – не обязательно научная…</a:t>
-            </a:r>
-          </a:p>
-          <a:p>
-            <a:pPr marL="74772">
-              <a:lnSpc>
-                <a:spcPct val="105000"/>
-              </a:lnSpc>
-              <a:buClr>
-                <a:srgbClr val="1F3864"/>
-              </a:buClr>
-              <a:buSzPct val="100000"/>
-            </a:pPr>
-            <a:r>
-              <a:rPr lang="ru-RU" sz="2400" dirty="0">
-                <a:solidFill>
-                  <a:srgbClr val="FF0000"/>
-                </a:solidFill>
-              </a:rPr>
-              <a:t>Обязательно дать </a:t>
-            </a:r>
-            <a:r>
-              <a:rPr lang="ru-RU" sz="2400" b="1" dirty="0">
-                <a:solidFill>
-                  <a:srgbClr val="FF0000"/>
-                </a:solidFill>
-              </a:rPr>
-              <a:t>ссылки на литературу</a:t>
-            </a:r>
+              <a:rPr lang="ru-RU" sz="2400" b="1" i="1" dirty="0">
+                <a:solidFill>
+                  <a:srgbClr val="002060"/>
+                </a:solidFill>
+              </a:rPr>
+              <a:t>Однозначного и окончательного решения</a:t>
+            </a:r>
+            <a:r>
+              <a:rPr lang="ru-RU" sz="2400" i="1" dirty="0">
+                <a:solidFill>
+                  <a:srgbClr val="002060"/>
+                </a:solidFill>
+              </a:rPr>
+              <a:t>, позволяющего преодолеть потери и искажения информации при устном обмене сведениями, в настоящий момент </a:t>
+            </a:r>
+            <a:r>
+              <a:rPr lang="ru-RU" sz="2400" b="1" i="1" dirty="0">
+                <a:solidFill>
+                  <a:srgbClr val="002060"/>
+                </a:solidFill>
+              </a:rPr>
+              <a:t>не существует</a:t>
+            </a:r>
+            <a:r>
+              <a:rPr lang="ru-RU" sz="2400" i="1" dirty="0">
+                <a:solidFill>
+                  <a:srgbClr val="002060"/>
+                </a:solidFill>
+              </a:rPr>
+              <a:t>.</a:t>
+            </a:r>
+            <a:endParaRPr lang="ru-RU" sz="2400" dirty="0">
+              <a:solidFill>
+                <a:srgbClr val="002060"/>
+              </a:solidFill>
+            </a:endParaRPr>
           </a:p>
         </p:txBody>
       </p:sp>
@@ -35159,7 +35596,7 @@
         <p:spPr>
           <a:xfrm>
             <a:off x="398796" y="2076301"/>
-            <a:ext cx="10851900" cy="2243451"/>
+            <a:ext cx="10851900" cy="4240795"/>
           </a:xfrm>
           <a:prstGeom prst="rect">
             <a:avLst/>
@@ -35171,10 +35608,185 @@
         </p:spPr>
         <p:txBody>
           <a:bodyPr spcFirstLastPara="1" wrap="square" lIns="91425" tIns="45700" rIns="91425" bIns="45700" anchor="t" anchorCtr="0">
-            <a:normAutofit/>
+            <a:normAutofit fontScale="25000" lnSpcReduction="20000"/>
           </a:bodyPr>
           <a:lstStyle/>
           <a:p>
+            <a:pPr>
+              <a:lnSpc>
+                <a:spcPct val="120000"/>
+              </a:lnSpc>
+              <a:spcAft>
+                <a:spcPts val="600"/>
+              </a:spcAft>
+            </a:pPr>
+            <a:r>
+              <a:rPr lang="ru-RU" sz="8000" dirty="0">
+                <a:solidFill>
+                  <a:srgbClr val="002060"/>
+                </a:solidFill>
+              </a:rPr>
+              <a:t>Поскольку в </a:t>
+            </a:r>
+            <a:r>
+              <a:rPr lang="en-US" sz="8000" dirty="0">
+                <a:solidFill>
+                  <a:srgbClr val="002060"/>
+                </a:solidFill>
+              </a:rPr>
+              <a:t>Agile</a:t>
+            </a:r>
+            <a:r>
+              <a:rPr lang="ru-RU" sz="8000" dirty="0">
+                <a:solidFill>
+                  <a:srgbClr val="002060"/>
+                </a:solidFill>
+              </a:rPr>
+              <a:t>-подходах отсутствуют предварительно согласованные технические задания разрабатываемого продукта, а требования заказчика скорее носят характер запросов, потребностей или «болей», возникает фокус на </a:t>
+            </a:r>
+            <a:r>
+              <a:rPr lang="ru-RU" sz="8000" b="1" dirty="0">
+                <a:solidFill>
+                  <a:srgbClr val="002060"/>
+                </a:solidFill>
+              </a:rPr>
+              <a:t>объекте исследования</a:t>
+            </a:r>
+            <a:r>
+              <a:rPr lang="ru-RU" sz="8000" dirty="0">
+                <a:solidFill>
+                  <a:srgbClr val="002060"/>
+                </a:solidFill>
+              </a:rPr>
+              <a:t>, которым являются </a:t>
+            </a:r>
+            <a:r>
+              <a:rPr lang="ru-RU" sz="8000" b="1" dirty="0">
+                <a:solidFill>
+                  <a:srgbClr val="002060"/>
+                </a:solidFill>
+              </a:rPr>
+              <a:t>подходы к управлению требованиями при гибкой разработке программного обеспечения (ПО).</a:t>
+            </a:r>
+          </a:p>
+          <a:p>
+            <a:pPr>
+              <a:lnSpc>
+                <a:spcPct val="120000"/>
+              </a:lnSpc>
+              <a:spcAft>
+                <a:spcPts val="600"/>
+              </a:spcAft>
+            </a:pPr>
+            <a:r>
+              <a:rPr lang="ru-RU" sz="8000" dirty="0">
+                <a:solidFill>
+                  <a:srgbClr val="002060"/>
+                </a:solidFill>
+              </a:rPr>
+              <a:t>Теория нечетких множеств предлагает новый подход к человеческому знанию, сочетая в себе </a:t>
+            </a:r>
+            <a:r>
+              <a:rPr lang="ru-RU" sz="8000" b="1" dirty="0">
+                <a:solidFill>
+                  <a:srgbClr val="002060"/>
+                </a:solidFill>
+              </a:rPr>
+              <a:t>конкретику математических вычислений </a:t>
+            </a:r>
+            <a:r>
+              <a:rPr lang="ru-RU" sz="8000" dirty="0">
+                <a:solidFill>
+                  <a:srgbClr val="002060"/>
+                </a:solidFill>
+              </a:rPr>
+              <a:t>с </a:t>
+            </a:r>
+            <a:r>
+              <a:rPr lang="ru-RU" sz="8000" b="1" dirty="0">
+                <a:solidFill>
+                  <a:srgbClr val="002060"/>
+                </a:solidFill>
+              </a:rPr>
+              <a:t>гибкостью суждений</a:t>
+            </a:r>
+            <a:r>
+              <a:rPr lang="ru-RU" sz="8000" dirty="0">
+                <a:solidFill>
+                  <a:srgbClr val="002060"/>
+                </a:solidFill>
+              </a:rPr>
+              <a:t>, позволяющую формировать дополнительное </a:t>
+            </a:r>
+            <a:r>
+              <a:rPr lang="ru-RU" sz="8000" b="1" dirty="0">
+                <a:solidFill>
+                  <a:srgbClr val="002060"/>
+                </a:solidFill>
+              </a:rPr>
+              <a:t>информационное приращение («информационную гранулу»)</a:t>
+            </a:r>
+            <a:r>
+              <a:rPr lang="ru-RU" sz="8000" dirty="0">
+                <a:solidFill>
+                  <a:srgbClr val="002060"/>
+                </a:solidFill>
+              </a:rPr>
+              <a:t> за счет включения в модель принятия решений не только четкой уверенности, но и сомнений</a:t>
+            </a:r>
+            <a:r>
+              <a:rPr lang="en-US" sz="8000" dirty="0">
+                <a:solidFill>
+                  <a:srgbClr val="002060"/>
+                </a:solidFill>
+              </a:rPr>
+              <a:t>. </a:t>
+            </a:r>
+            <a:r>
+              <a:rPr lang="ru-RU" sz="8000" dirty="0">
+                <a:solidFill>
+                  <a:srgbClr val="002060"/>
+                </a:solidFill>
+              </a:rPr>
+              <a:t>Исходя из этого, </a:t>
+            </a:r>
+            <a:r>
+              <a:rPr lang="ru-RU" sz="8000" b="1" dirty="0">
+                <a:solidFill>
+                  <a:srgbClr val="002060"/>
+                </a:solidFill>
+              </a:rPr>
+              <a:t>теория нечетких множеств </a:t>
+            </a:r>
+            <a:r>
+              <a:rPr lang="ru-RU" sz="8000" dirty="0">
+                <a:solidFill>
+                  <a:srgbClr val="002060"/>
+                </a:solidFill>
+              </a:rPr>
+              <a:t>и ее математический аппарат, выбраны в качестве </a:t>
+            </a:r>
+            <a:r>
+              <a:rPr lang="ru-RU" sz="8000" b="1" dirty="0">
+                <a:solidFill>
+                  <a:srgbClr val="002060"/>
+                </a:solidFill>
+              </a:rPr>
+              <a:t>предмета исследования</a:t>
+            </a:r>
+            <a:r>
+              <a:rPr lang="ru-RU" sz="8000" dirty="0">
+                <a:solidFill>
+                  <a:srgbClr val="002060"/>
+                </a:solidFill>
+              </a:rPr>
+              <a:t> в данной работе.</a:t>
+            </a:r>
+          </a:p>
+          <a:p>
+            <a:endParaRPr lang="ru-RU" dirty="0"/>
+          </a:p>
+          <a:p>
             <a:pPr marL="74772">
               <a:lnSpc>
                 <a:spcPct val="105000"/>
@@ -35184,49 +35796,11 @@
               </a:buClr>
               <a:buSzPct val="100000"/>
             </a:pPr>
-            <a:r>
-              <a:rPr lang="ru-RU" sz="2400" b="1" dirty="0">
-                <a:solidFill>
-                  <a:srgbClr val="FF0000"/>
-                </a:solidFill>
-              </a:rPr>
-              <a:t>Объектом исследования </a:t>
-            </a:r>
-            <a:r>
-              <a:rPr lang="ru-RU" sz="2400" dirty="0">
-                <a:solidFill>
-                  <a:srgbClr val="FF0000"/>
-                </a:solidFill>
-              </a:rPr>
-              <a:t>являются подходы к управлению требованиями при гибкой разработке программного обеспечения (ПО).</a:t>
-            </a:r>
-          </a:p>
-          <a:p>
-            <a:pPr marL="74772">
-              <a:lnSpc>
-                <a:spcPct val="105000"/>
-              </a:lnSpc>
-              <a:buClr>
-                <a:srgbClr val="1F3864"/>
-              </a:buClr>
-              <a:buSzPct val="100000"/>
-            </a:pPr>
-            <a:r>
-              <a:rPr lang="ru-RU" sz="2400" b="1" dirty="0">
-                <a:solidFill>
-                  <a:srgbClr val="FF0000"/>
-                </a:solidFill>
-              </a:rPr>
-              <a:t>Предметом исследования </a:t>
-            </a:r>
-            <a:r>
-              <a:rPr lang="ru-RU" sz="2400" dirty="0">
-                <a:solidFill>
-                  <a:srgbClr val="FF0000"/>
-                </a:solidFill>
-              </a:rPr>
-              <a:t>является аппарат нечетких множеств.</a:t>
-            </a:r>
+            <a:endParaRPr lang="ru-RU" sz="2400" dirty="0">
+              <a:solidFill>
+                <a:srgbClr val="FF0000"/>
+              </a:solidFill>
+            </a:endParaRPr>
           </a:p>
         </p:txBody>
       </p:sp>
@@ -35561,18 +36135,101 @@
               <a:lnSpc>
                 <a:spcPct val="105000"/>
               </a:lnSpc>
+              <a:spcAft>
+                <a:spcPts val="600"/>
+              </a:spcAft>
               <a:buClr>
                 <a:srgbClr val="1F3864"/>
               </a:buClr>
               <a:buSzPct val="100000"/>
             </a:pPr>
             <a:r>
-              <a:rPr lang="ru-RU" sz="2400" dirty="0">
-                <a:solidFill>
-                  <a:srgbClr val="FF0000"/>
-                </a:solidFill>
-              </a:rPr>
-              <a:t>Анализ того, что есть, что уже сделано и что надо сделать</a:t>
+              <a:rPr lang="ru-RU" sz="2000" dirty="0">
+                <a:solidFill>
+                  <a:srgbClr val="002060"/>
+                </a:solidFill>
+              </a:rPr>
+              <a:t>Теория нечетких множеств обладает </a:t>
+            </a:r>
+            <a:r>
+              <a:rPr lang="ru-RU" sz="2000" b="1" dirty="0">
+                <a:solidFill>
+                  <a:srgbClr val="002060"/>
+                </a:solidFill>
+              </a:rPr>
+              <a:t>способностью формализовывать информацию в числовом виде</a:t>
+            </a:r>
+            <a:r>
+              <a:rPr lang="ru-RU" sz="2000" dirty="0">
+                <a:solidFill>
+                  <a:srgbClr val="002060"/>
+                </a:solidFill>
+              </a:rPr>
+              <a:t>, при этом </a:t>
+            </a:r>
+            <a:r>
+              <a:rPr lang="ru-RU" sz="2000" b="1" dirty="0">
+                <a:solidFill>
+                  <a:srgbClr val="002060"/>
+                </a:solidFill>
+              </a:rPr>
+              <a:t>сокращать потери информации</a:t>
+            </a:r>
+            <a:r>
+              <a:rPr lang="ru-RU" sz="2000" dirty="0">
+                <a:solidFill>
+                  <a:srgbClr val="002060"/>
+                </a:solidFill>
+              </a:rPr>
+              <a:t>, содержащейся в лингвистических конструкциях. которые обычная, четкая математика обрабатывать не способна. Задачей данной работы будет являться исследование </a:t>
+            </a:r>
+            <a:r>
+              <a:rPr lang="ru-RU" sz="2000" b="1" dirty="0">
+                <a:solidFill>
+                  <a:srgbClr val="002060"/>
+                </a:solidFill>
+              </a:rPr>
+              <a:t>применения нечетких подходов в управлении требованиями при гибкой разработке ПО</a:t>
+            </a:r>
+            <a:r>
+              <a:rPr lang="ru-RU" sz="2000" dirty="0">
+                <a:solidFill>
+                  <a:srgbClr val="002060"/>
+                </a:solidFill>
+              </a:rPr>
+              <a:t>, когда информация должна быть формализована и обработана, насколько возможно </a:t>
+            </a:r>
+            <a:r>
+              <a:rPr lang="ru-RU" sz="2000" b="1" dirty="0">
+                <a:solidFill>
+                  <a:srgbClr val="002060"/>
+                </a:solidFill>
+              </a:rPr>
+              <a:t>точно</a:t>
+            </a:r>
+            <a:r>
+              <a:rPr lang="ru-RU" sz="2000" dirty="0">
+                <a:solidFill>
+                  <a:srgbClr val="002060"/>
+                </a:solidFill>
+              </a:rPr>
+              <a:t>, при этом сохраняя </a:t>
+            </a:r>
+            <a:r>
+              <a:rPr lang="ru-RU" sz="2000" b="1" dirty="0">
+                <a:solidFill>
+                  <a:srgbClr val="002060"/>
+                </a:solidFill>
+              </a:rPr>
+              <a:t>гибкость</a:t>
+            </a:r>
+            <a:r>
+              <a:rPr lang="ru-RU" sz="2000" dirty="0">
+                <a:solidFill>
+                  <a:srgbClr val="002060"/>
+                </a:solidFill>
+              </a:rPr>
+              <a:t> тех формулировок, которые были изначально озвучены стейкхолдерами. </a:t>
             </a:r>
           </a:p>
           <a:p>
@@ -35580,19 +36237,86 @@
               <a:lnSpc>
                 <a:spcPct val="105000"/>
               </a:lnSpc>
+              <a:spcAft>
+                <a:spcPts val="600"/>
+              </a:spcAft>
               <a:buClr>
                 <a:srgbClr val="1F3864"/>
               </a:buClr>
               <a:buSzPct val="100000"/>
             </a:pPr>
             <a:r>
-              <a:rPr lang="ru-RU" sz="2400" dirty="0">
-                <a:solidFill>
-                  <a:srgbClr val="FF0000"/>
-                </a:solidFill>
-              </a:rPr>
-              <a:t>Наглядно представить, что достижение той цели, которая поставлена, позволит решить проблему</a:t>
-            </a:r>
+              <a:rPr lang="ru-RU" sz="2000" dirty="0">
+                <a:solidFill>
+                  <a:srgbClr val="002060"/>
+                </a:solidFill>
+              </a:rPr>
+              <a:t>Сохраняя все преимущества математических вычислений, </a:t>
+            </a:r>
+            <a:r>
+              <a:rPr lang="ru-RU" sz="2000" b="1" dirty="0">
+                <a:solidFill>
+                  <a:srgbClr val="002060"/>
+                </a:solidFill>
+              </a:rPr>
+              <a:t>результат нечеткого моделирования в наглядном виде может быть сравним с четкой моделью</a:t>
+            </a:r>
+            <a:r>
+              <a:rPr lang="ru-RU" sz="2000" dirty="0">
+                <a:solidFill>
+                  <a:srgbClr val="002060"/>
+                </a:solidFill>
+              </a:rPr>
+              <a:t>, что позволит сделать </a:t>
+            </a:r>
+            <a:r>
+              <a:rPr lang="ru-RU" sz="2000" b="1" dirty="0">
+                <a:solidFill>
+                  <a:srgbClr val="002060"/>
+                </a:solidFill>
+              </a:rPr>
+              <a:t>выводы о целесообразности применения данного методического подхода</a:t>
+            </a:r>
+            <a:r>
+              <a:rPr lang="ru-RU" sz="2000" dirty="0">
+                <a:solidFill>
+                  <a:srgbClr val="002060"/>
+                </a:solidFill>
+              </a:rPr>
+              <a:t> в </a:t>
+            </a:r>
+            <a:r>
+              <a:rPr lang="en-US" sz="2000" dirty="0">
+                <a:solidFill>
+                  <a:srgbClr val="002060"/>
+                </a:solidFill>
+              </a:rPr>
+              <a:t>Agile</a:t>
+            </a:r>
+            <a:r>
+              <a:rPr lang="ru-RU" sz="2000" dirty="0">
+                <a:solidFill>
+                  <a:srgbClr val="002060"/>
+                </a:solidFill>
+              </a:rPr>
+              <a:t>-методологиях и дальнейших исследованиях по данной теме.</a:t>
+            </a:r>
+          </a:p>
+          <a:p>
+            <a:pPr marL="74772">
+              <a:lnSpc>
+                <a:spcPct val="105000"/>
+              </a:lnSpc>
+              <a:buClr>
+                <a:srgbClr val="1F3864"/>
+              </a:buClr>
+              <a:buSzPct val="100000"/>
+            </a:pPr>
+            <a:endParaRPr lang="ru-RU" sz="2400" dirty="0">
+              <a:solidFill>
+                <a:srgbClr val="FF0000"/>
+              </a:solidFill>
+            </a:endParaRPr>
           </a:p>
         </p:txBody>
       </p:sp>
@@ -36492,27 +37216,120 @@
           </a:bodyPr>
           <a:lstStyle/>
           <a:p>
-            <a:pPr marL="74772">
-              <a:lnSpc>
-                <a:spcPct val="115000"/>
-              </a:lnSpc>
-              <a:buClr>
-                <a:srgbClr val="1F3864"/>
-              </a:buClr>
-              <a:buSzPct val="100000"/>
+            <a:pPr marL="457200" indent="-457200">
+              <a:buFont typeface="Arial" panose="020B0604020202020204" pitchFamily="34" charset="0"/>
+              <a:buChar char="•"/>
             </a:pPr>
             <a:r>
               <a:rPr lang="ru-RU" sz="2800" dirty="0">
                 <a:solidFill>
-                  <a:srgbClr val="FF0000"/>
-                </a:solidFill>
-              </a:rPr>
-              <a:t>Гибкая разработка ПО; сбор требований; формализация требований; приоритизация требований; нечеткие множества; нечеткие числа; размытость; </a:t>
-            </a:r>
+                  <a:srgbClr val="002060"/>
+                </a:solidFill>
+              </a:rPr>
+              <a:t>гибкая разработка ПО </a:t>
+            </a:r>
+          </a:p>
+          <a:p>
+            <a:pPr marL="457200" indent="-457200">
+              <a:buFont typeface="Arial" panose="020B0604020202020204" pitchFamily="34" charset="0"/>
+              <a:buChar char="•"/>
+            </a:pPr>
+            <a:r>
+              <a:rPr lang="en-US" sz="2800" dirty="0">
+                <a:solidFill>
+                  <a:srgbClr val="002060"/>
+                </a:solidFill>
+              </a:rPr>
+              <a:t>Agile</a:t>
+            </a:r>
+            <a:r>
+              <a:rPr lang="ru-RU" sz="2800" dirty="0">
+                <a:solidFill>
+                  <a:srgbClr val="002060"/>
+                </a:solidFill>
+              </a:rPr>
+              <a:t>-методология </a:t>
+            </a:r>
+          </a:p>
+          <a:p>
+            <a:pPr marL="457200" indent="-457200">
+              <a:buFont typeface="Arial" panose="020B0604020202020204" pitchFamily="34" charset="0"/>
+              <a:buChar char="•"/>
+            </a:pPr>
+            <a:r>
+              <a:rPr lang="ru-RU" sz="2800" dirty="0">
+                <a:solidFill>
+                  <a:srgbClr val="002060"/>
+                </a:solidFill>
+              </a:rPr>
+              <a:t>сбор требований </a:t>
+            </a:r>
+          </a:p>
+          <a:p>
+            <a:pPr marL="457200" indent="-457200">
+              <a:buFont typeface="Arial" panose="020B0604020202020204" pitchFamily="34" charset="0"/>
+              <a:buChar char="•"/>
+            </a:pPr>
+            <a:r>
+              <a:rPr lang="ru-RU" sz="2800" dirty="0">
+                <a:solidFill>
+                  <a:srgbClr val="002060"/>
+                </a:solidFill>
+              </a:rPr>
+              <a:t>формализация требований </a:t>
+            </a:r>
+          </a:p>
+          <a:p>
+            <a:pPr marL="457200" indent="-457200">
+              <a:buFont typeface="Arial" panose="020B0604020202020204" pitchFamily="34" charset="0"/>
+              <a:buChar char="•"/>
+            </a:pPr>
+            <a:r>
+              <a:rPr lang="ru-RU" sz="2800" dirty="0">
+                <a:solidFill>
+                  <a:srgbClr val="002060"/>
+                </a:solidFill>
+              </a:rPr>
+              <a:t>приоритизация требований </a:t>
+            </a:r>
+          </a:p>
+          <a:p>
+            <a:pPr marL="457200" indent="-457200">
+              <a:buFont typeface="Arial" panose="020B0604020202020204" pitchFamily="34" charset="0"/>
+              <a:buChar char="•"/>
+            </a:pPr>
+            <a:r>
+              <a:rPr lang="ru-RU" sz="2800" dirty="0">
+                <a:solidFill>
+                  <a:srgbClr val="002060"/>
+                </a:solidFill>
+              </a:rPr>
+              <a:t>нечеткие множества </a:t>
+            </a:r>
+          </a:p>
+          <a:p>
+            <a:pPr marL="457200" indent="-457200">
+              <a:buFont typeface="Arial" panose="020B0604020202020204" pitchFamily="34" charset="0"/>
+              <a:buChar char="•"/>
+            </a:pPr>
+            <a:r>
+              <a:rPr lang="ru-RU" sz="2800" dirty="0">
+                <a:solidFill>
+                  <a:srgbClr val="002060"/>
+                </a:solidFill>
+              </a:rPr>
+              <a:t>нечеткие числа </a:t>
+            </a:r>
+          </a:p>
+          <a:p>
+            <a:pPr marL="457200" indent="-457200">
+              <a:buFont typeface="Arial" panose="020B0604020202020204" pitchFamily="34" charset="0"/>
+              <a:buChar char="•"/>
+            </a:pPr>
             <a:r>
               <a:rPr lang="ru-RU" sz="2800" dirty="0" err="1">
                 <a:solidFill>
-                  <a:srgbClr val="FF0000"/>
+                  <a:srgbClr val="002060"/>
                 </a:solidFill>
               </a:rPr>
               <a:t>дефаззификация</a:t>
@@ -36520,10 +37337,30 @@
             <a:r>
               <a:rPr lang="ru-RU" sz="2800" dirty="0">
                 <a:solidFill>
-                  <a:srgbClr val="FF0000"/>
-                </a:solidFill>
-              </a:rPr>
-              <a:t>; оценки стейкхолдеров.</a:t>
+                  <a:srgbClr val="002060"/>
+                </a:solidFill>
+              </a:rPr>
+              <a:t> </a:t>
+            </a:r>
+          </a:p>
+          <a:p>
+            <a:pPr marL="457200" indent="-457200">
+              <a:buFont typeface="Arial" panose="020B0604020202020204" pitchFamily="34" charset="0"/>
+              <a:buChar char="•"/>
+            </a:pPr>
+            <a:r>
+              <a:rPr lang="ru-RU" sz="2800" dirty="0">
+                <a:solidFill>
+                  <a:srgbClr val="002060"/>
+                </a:solidFill>
+              </a:rPr>
+              <a:t>оценки стейкхолдеров</a:t>
+            </a:r>
+          </a:p>
+          <a:p>
+            <a:r>
+              <a:rPr lang="ru-RU" dirty="0"/>
+              <a:t> </a:t>
             </a:r>
           </a:p>
         </p:txBody>
